--- a/obhajoba_prezentace.pptx
+++ b/obhajoba_prezentace.pptx
@@ -1653,6 +1653,50 @@
           </a:p>
         </p:txBody>
       </p:sp>
+      <p:pic>
+        <p:nvPicPr>
+          <p:cNvPr id="11" name="Obrázek 10" descr="Detail fakulty | GAUDEAMUS">
+            <a:extLst>
+              <a:ext uri="{FF2B5EF4-FFF2-40B4-BE49-F238E27FC236}">
+                <a16:creationId xmlns:a16="http://schemas.microsoft.com/office/drawing/2014/main" id="{DCEAE742-715A-E24A-91EA-2E67D51748F4}"/>
+              </a:ext>
+            </a:extLst>
+          </p:cNvPr>
+          <p:cNvPicPr>
+            <a:picLocks noChangeAspect="1"/>
+          </p:cNvPicPr>
+          <p:nvPr/>
+        </p:nvPicPr>
+        <p:blipFill>
+          <a:blip r:embed="rId3"/>
+          <a:stretch>
+            <a:fillRect/>
+          </a:stretch>
+        </p:blipFill>
+        <p:spPr>
+          <a:xfrm>
+            <a:off x="5858256" y="3082400"/>
+            <a:ext cx="3240024" cy="2037477"/>
+          </a:xfrm>
+          <a:prstGeom prst="rect">
+            <a:avLst/>
+          </a:prstGeom>
+        </p:spPr>
+        <p:style>
+          <a:lnRef idx="2">
+            <a:schemeClr val="accent1"/>
+          </a:lnRef>
+          <a:fillRef idx="1">
+            <a:schemeClr val="lt1"/>
+          </a:fillRef>
+          <a:effectRef idx="0">
+            <a:schemeClr val="accent1"/>
+          </a:effectRef>
+          <a:fontRef idx="minor">
+            <a:schemeClr val="dk1"/>
+          </a:fontRef>
+        </p:style>
+      </p:pic>
     </p:spTree>
   </p:cSld>
   <p:clrMapOvr>
@@ -1824,7 +1868,7 @@
           <a:bodyPr/>
           <a:lstStyle/>
           <a:p>
-            <a:endParaRPr lang="cs-CZ"/>
+            <a:endParaRPr lang="cs-CZ" dirty="0"/>
           </a:p>
         </p:txBody>
       </p:sp>
@@ -1852,14 +1896,6 @@
             <a:pPr marL="0" indent="0" algn="ctr">
               <a:buNone/>
             </a:pPr>
-            <a:r>
-              <a:rPr lang="en-US" sz="2800" dirty="0">
-                <a:solidFill>
-                  <a:srgbClr val="000000"/>
-                </a:solidFill>
-              </a:rPr>
-              <a:t>💬</a:t>
-            </a:r>
             <a:endParaRPr lang="en-US" sz="2800" dirty="0"/>
           </a:p>
         </p:txBody>
@@ -1917,11 +1953,11 @@
           <a:bodyPr wrap="square" rtlCol="0" anchor="t"/>
           <a:lstStyle/>
           <a:p>
-            <a:pPr marL="0" indent="0">
+            <a:pPr marL="0" indent="0" algn="ctr">
               <a:buNone/>
             </a:pPr>
             <a:r>
-              <a:rPr lang="en-US" sz="1200" b="1" dirty="0">
+              <a:rPr lang="en-US" b="1" dirty="0">
                 <a:solidFill>
                   <a:srgbClr val="1E293B"/>
                 </a:solidFill>
@@ -1931,7 +1967,7 @@
               </a:rPr>
               <a:t>Narůstající objem konverzací</a:t>
             </a:r>
-            <a:endParaRPr lang="en-US" sz="1200" dirty="0"/>
+            <a:endParaRPr lang="en-US" dirty="0"/>
           </a:p>
         </p:txBody>
       </p:sp>
@@ -2037,14 +2073,6 @@
             <a:pPr marL="0" indent="0" algn="ctr">
               <a:buNone/>
             </a:pPr>
-            <a:r>
-              <a:rPr lang="en-US" sz="2800" dirty="0">
-                <a:solidFill>
-                  <a:srgbClr val="000000"/>
-                </a:solidFill>
-              </a:rPr>
-              <a:t>🔍</a:t>
-            </a:r>
             <a:endParaRPr lang="en-US" sz="2800" dirty="0"/>
           </a:p>
         </p:txBody>
@@ -2102,11 +2130,11 @@
           <a:bodyPr wrap="square" rtlCol="0" anchor="t"/>
           <a:lstStyle/>
           <a:p>
-            <a:pPr marL="0" indent="0">
+            <a:pPr marL="0" indent="0" algn="ctr">
               <a:buNone/>
             </a:pPr>
             <a:r>
-              <a:rPr lang="en-US" sz="1200" b="1" dirty="0">
+              <a:rPr lang="en-US" b="1" dirty="0">
                 <a:solidFill>
                   <a:srgbClr val="1E293B"/>
                 </a:solidFill>
@@ -2116,7 +2144,7 @@
               </a:rPr>
               <a:t>Potřeba automatické analýzy</a:t>
             </a:r>
-            <a:endParaRPr lang="en-US" sz="1200" dirty="0"/>
+            <a:endParaRPr lang="en-US" dirty="0"/>
           </a:p>
         </p:txBody>
       </p:sp>
@@ -2222,14 +2250,6 @@
             <a:pPr marL="0" indent="0" algn="ctr">
               <a:buNone/>
             </a:pPr>
-            <a:r>
-              <a:rPr lang="en-US" sz="2800" dirty="0">
-                <a:solidFill>
-                  <a:srgbClr val="000000"/>
-                </a:solidFill>
-              </a:rPr>
-              <a:t>🔒</a:t>
-            </a:r>
             <a:endParaRPr lang="en-US" sz="2800" dirty="0"/>
           </a:p>
         </p:txBody>
@@ -2287,49 +2307,49 @@
           <a:bodyPr wrap="square" rtlCol="0" anchor="t"/>
           <a:lstStyle/>
           <a:p>
+            <a:pPr marL="0" indent="0" algn="ctr">
+              <a:buNone/>
+            </a:pPr>
+            <a:r>
+              <a:rPr lang="en-US" b="1" dirty="0">
+                <a:solidFill>
+                  <a:srgbClr val="1E293B"/>
+                </a:solidFill>
+                <a:latin typeface="Calibri" pitchFamily="34" charset="0"/>
+                <a:ea typeface="Calibri" pitchFamily="34" charset="-122"/>
+                <a:cs typeface="Calibri" pitchFamily="34" charset="-120"/>
+              </a:rPr>
+              <a:t>GDPR a ochrana dat</a:t>
+            </a:r>
+            <a:endParaRPr lang="en-US" dirty="0"/>
+          </a:p>
+        </p:txBody>
+      </p:sp>
+      <p:sp>
+        <p:nvSpPr>
+          <p:cNvPr id="19" name="Text 17"/>
+          <p:cNvSpPr/>
+          <p:nvPr/>
+        </p:nvSpPr>
+        <p:spPr>
+          <a:xfrm>
+            <a:off x="6355080" y="2468880"/>
+            <a:ext cx="2468880" cy="1920240"/>
+          </a:xfrm>
+          <a:prstGeom prst="rect">
+            <a:avLst/>
+          </a:prstGeom>
+          <a:noFill/>
+          <a:ln/>
+        </p:spPr>
+        <p:txBody>
+          <a:bodyPr wrap="square" rtlCol="0" anchor="t"/>
+          <a:lstStyle/>
+          <a:p>
             <a:pPr marL="0" indent="0">
               <a:buNone/>
             </a:pPr>
             <a:r>
-              <a:rPr lang="en-US" sz="1200" b="1" dirty="0">
-                <a:solidFill>
-                  <a:srgbClr val="1E293B"/>
-                </a:solidFill>
-                <a:latin typeface="Calibri" pitchFamily="34" charset="0"/>
-                <a:ea typeface="Calibri" pitchFamily="34" charset="-122"/>
-                <a:cs typeface="Calibri" pitchFamily="34" charset="-120"/>
-              </a:rPr>
-              <a:t>GDPR a ochrana dat</a:t>
-            </a:r>
-            <a:endParaRPr lang="en-US" sz="1200" dirty="0"/>
-          </a:p>
-        </p:txBody>
-      </p:sp>
-      <p:sp>
-        <p:nvSpPr>
-          <p:cNvPr id="19" name="Text 17"/>
-          <p:cNvSpPr/>
-          <p:nvPr/>
-        </p:nvSpPr>
-        <p:spPr>
-          <a:xfrm>
-            <a:off x="6355080" y="2468880"/>
-            <a:ext cx="2468880" cy="1920240"/>
-          </a:xfrm>
-          <a:prstGeom prst="rect">
-            <a:avLst/>
-          </a:prstGeom>
-          <a:noFill/>
-          <a:ln/>
-        </p:spPr>
-        <p:txBody>
-          <a:bodyPr wrap="square" rtlCol="0" anchor="t"/>
-          <a:lstStyle/>
-          <a:p>
-            <a:pPr marL="0" indent="0">
-              <a:buNone/>
-            </a:pPr>
-            <a:r>
               <a:rPr lang="en-US" sz="1100" dirty="0">
                 <a:solidFill>
                   <a:srgbClr val="64748B"/>
@@ -2344,6 +2364,96 @@
           </a:p>
         </p:txBody>
       </p:sp>
+      <p:pic>
+        <p:nvPicPr>
+          <p:cNvPr id="20" name="Obrázek 19" descr="Live Chat Symbol Icon PNG Transparent Background, Free Download #7407 -  FreeIconsPNG">
+            <a:extLst>
+              <a:ext uri="{FF2B5EF4-FFF2-40B4-BE49-F238E27FC236}">
+                <a16:creationId xmlns:a16="http://schemas.microsoft.com/office/drawing/2014/main" id="{058A22E1-7D8C-8D3D-51B0-DE770C514939}"/>
+              </a:ext>
+            </a:extLst>
+          </p:cNvPr>
+          <p:cNvPicPr>
+            <a:picLocks noChangeAspect="1"/>
+          </p:cNvPicPr>
+          <p:nvPr/>
+        </p:nvPicPr>
+        <p:blipFill>
+          <a:blip r:embed="rId3"/>
+          <a:stretch>
+            <a:fillRect/>
+          </a:stretch>
+        </p:blipFill>
+        <p:spPr>
+          <a:xfrm>
+            <a:off x="1312164" y="1069848"/>
+            <a:ext cx="667512" cy="667512"/>
+          </a:xfrm>
+          <a:prstGeom prst="rect">
+            <a:avLst/>
+          </a:prstGeom>
+        </p:spPr>
+      </p:pic>
+      <p:pic>
+        <p:nvPicPr>
+          <p:cNvPr id="21" name="Obrázek 20" descr="Analysis - Free seo and web icons">
+            <a:extLst>
+              <a:ext uri="{FF2B5EF4-FFF2-40B4-BE49-F238E27FC236}">
+                <a16:creationId xmlns:a16="http://schemas.microsoft.com/office/drawing/2014/main" id="{50207C51-5612-0F75-A5DE-1E51027F7611}"/>
+              </a:ext>
+            </a:extLst>
+          </p:cNvPr>
+          <p:cNvPicPr>
+            <a:picLocks noChangeAspect="1"/>
+          </p:cNvPicPr>
+          <p:nvPr/>
+        </p:nvPicPr>
+        <p:blipFill>
+          <a:blip r:embed="rId4"/>
+          <a:stretch>
+            <a:fillRect/>
+          </a:stretch>
+        </p:blipFill>
+        <p:spPr>
+          <a:xfrm>
+            <a:off x="4342352" y="1128237"/>
+            <a:ext cx="550735" cy="550735"/>
+          </a:xfrm>
+          <a:prstGeom prst="rect">
+            <a:avLst/>
+          </a:prstGeom>
+        </p:spPr>
+      </p:pic>
+      <p:pic>
+        <p:nvPicPr>
+          <p:cNvPr id="24" name="Obrázek 23" descr="GDPR - Free security icons">
+            <a:extLst>
+              <a:ext uri="{FF2B5EF4-FFF2-40B4-BE49-F238E27FC236}">
+                <a16:creationId xmlns:a16="http://schemas.microsoft.com/office/drawing/2014/main" id="{E38A2572-D74F-EFCE-7588-7BF69DC05CCA}"/>
+              </a:ext>
+            </a:extLst>
+          </p:cNvPr>
+          <p:cNvPicPr>
+            <a:picLocks noChangeAspect="1"/>
+          </p:cNvPicPr>
+          <p:nvPr/>
+        </p:nvPicPr>
+        <p:blipFill>
+          <a:blip r:embed="rId5"/>
+          <a:stretch>
+            <a:fillRect/>
+          </a:stretch>
+        </p:blipFill>
+        <p:spPr>
+          <a:xfrm>
+            <a:off x="7314152" y="1128237"/>
+            <a:ext cx="550735" cy="550735"/>
+          </a:xfrm>
+          <a:prstGeom prst="rect">
+            <a:avLst/>
+          </a:prstGeom>
+        </p:spPr>
+      </p:pic>
     </p:spTree>
   </p:cSld>
   <p:clrMapOvr>
@@ -3387,7 +3497,7 @@
                 <a:ea typeface="Calibri" pitchFamily="34" charset="-122"/>
                 <a:cs typeface="Calibri" pitchFamily="34" charset="-120"/>
               </a:rPr>
-              <a:t>🐍 Python</a:t>
+              <a:t> Python</a:t>
             </a:r>
             <a:endParaRPr lang="en-US" sz="1100" dirty="0"/>
           </a:p>
@@ -3465,61 +3575,46 @@
                 <a:ea typeface="Calibri" pitchFamily="34" charset="-122"/>
                 <a:cs typeface="Calibri" pitchFamily="34" charset="-120"/>
               </a:rPr>
-              <a:t>🤗 Hugging Face Transformers</a:t>
-            </a:r>
-            <a:endParaRPr lang="en-US" sz="1100" dirty="0"/>
-          </a:p>
-        </p:txBody>
-      </p:sp>
-      <p:sp>
-        <p:nvSpPr>
-          <p:cNvPr id="11" name="Text 9"/>
-          <p:cNvSpPr/>
-          <p:nvPr/>
-        </p:nvSpPr>
-        <p:spPr>
-          <a:xfrm>
-            <a:off x="2468880" y="2029968"/>
-            <a:ext cx="1737360" cy="457200"/>
-          </a:xfrm>
-          <a:prstGeom prst="rect">
-            <a:avLst/>
-          </a:prstGeom>
-          <a:noFill/>
-          <a:ln/>
-        </p:spPr>
-        <p:txBody>
-          <a:bodyPr wrap="square" rtlCol="0" anchor="ctr"/>
-          <a:lstStyle/>
+              <a:t>Hugging Face </a:t>
+            </a:r>
+            <a:endParaRPr lang="cs-CZ" sz="1100" b="1" dirty="0">
+              <a:solidFill>
+                <a:srgbClr val="1E293B"/>
+              </a:solidFill>
+              <a:latin typeface="Calibri" pitchFamily="34" charset="0"/>
+              <a:ea typeface="Calibri" pitchFamily="34" charset="-122"/>
+              <a:cs typeface="Calibri" pitchFamily="34" charset="-120"/>
+            </a:endParaRPr>
+          </a:p>
           <a:p>
             <a:pPr marL="0" indent="0">
               <a:buNone/>
             </a:pPr>
             <a:r>
-              <a:rPr lang="en-US" sz="1000" dirty="0">
-                <a:solidFill>
-                  <a:srgbClr val="64748B"/>
-                </a:solidFill>
-                <a:latin typeface="Calibri" pitchFamily="34" charset="0"/>
-                <a:ea typeface="Calibri" pitchFamily="34" charset="-122"/>
-                <a:cs typeface="Calibri" pitchFamily="34" charset="-120"/>
-              </a:rPr>
-              <a:t>knihovna pro NLP modely</a:t>
-            </a:r>
-            <a:endParaRPr lang="en-US" sz="1000" dirty="0"/>
-          </a:p>
-        </p:txBody>
-      </p:sp>
-      <p:sp>
-        <p:nvSpPr>
-          <p:cNvPr id="12" name="Text 10"/>
-          <p:cNvSpPr/>
-          <p:nvPr/>
-        </p:nvSpPr>
-        <p:spPr>
-          <a:xfrm>
-            <a:off x="502920" y="2578608"/>
-            <a:ext cx="1920240" cy="457200"/>
+              <a:rPr lang="en-US" sz="1100" b="1" dirty="0">
+                <a:solidFill>
+                  <a:srgbClr val="1E293B"/>
+                </a:solidFill>
+                <a:latin typeface="Calibri" pitchFamily="34" charset="0"/>
+                <a:ea typeface="Calibri" pitchFamily="34" charset="-122"/>
+                <a:cs typeface="Calibri" pitchFamily="34" charset="-120"/>
+              </a:rPr>
+              <a:t>Transformers</a:t>
+            </a:r>
+            <a:endParaRPr lang="en-US" sz="1100" dirty="0"/>
+          </a:p>
+        </p:txBody>
+      </p:sp>
+      <p:sp>
+        <p:nvSpPr>
+          <p:cNvPr id="11" name="Text 9"/>
+          <p:cNvSpPr/>
+          <p:nvPr/>
+        </p:nvSpPr>
+        <p:spPr>
+          <a:xfrm>
+            <a:off x="2468880" y="2029968"/>
+            <a:ext cx="1737360" cy="457200"/>
           </a:xfrm>
           <a:prstGeom prst="rect">
             <a:avLst/>
@@ -3535,30 +3630,30 @@
               <a:buNone/>
             </a:pPr>
             <a:r>
-              <a:rPr lang="en-US" sz="1100" b="1" dirty="0">
-                <a:solidFill>
-                  <a:srgbClr val="1E293B"/>
-                </a:solidFill>
-                <a:latin typeface="Calibri" pitchFamily="34" charset="0"/>
-                <a:ea typeface="Calibri" pitchFamily="34" charset="-122"/>
-                <a:cs typeface="Calibri" pitchFamily="34" charset="-120"/>
-              </a:rPr>
-              <a:t>🧠 RoBERTa base</a:t>
-            </a:r>
-            <a:endParaRPr lang="en-US" sz="1100" dirty="0"/>
-          </a:p>
-        </p:txBody>
-      </p:sp>
-      <p:sp>
-        <p:nvSpPr>
-          <p:cNvPr id="13" name="Text 11"/>
-          <p:cNvSpPr/>
-          <p:nvPr/>
-        </p:nvSpPr>
-        <p:spPr>
-          <a:xfrm>
-            <a:off x="2468880" y="2578608"/>
-            <a:ext cx="1737360" cy="457200"/>
+              <a:rPr lang="en-US" sz="1000" dirty="0">
+                <a:solidFill>
+                  <a:srgbClr val="64748B"/>
+                </a:solidFill>
+                <a:latin typeface="Calibri" pitchFamily="34" charset="0"/>
+                <a:ea typeface="Calibri" pitchFamily="34" charset="-122"/>
+                <a:cs typeface="Calibri" pitchFamily="34" charset="-120"/>
+              </a:rPr>
+              <a:t>knihovna pro NLP modely</a:t>
+            </a:r>
+            <a:endParaRPr lang="en-US" sz="1000" dirty="0"/>
+          </a:p>
+        </p:txBody>
+      </p:sp>
+      <p:sp>
+        <p:nvSpPr>
+          <p:cNvPr id="12" name="Text 10"/>
+          <p:cNvSpPr/>
+          <p:nvPr/>
+        </p:nvSpPr>
+        <p:spPr>
+          <a:xfrm>
+            <a:off x="502920" y="2578608"/>
+            <a:ext cx="1920240" cy="457200"/>
           </a:xfrm>
           <a:prstGeom prst="rect">
             <a:avLst/>
@@ -3574,30 +3669,41 @@
               <a:buNone/>
             </a:pPr>
             <a:r>
-              <a:rPr lang="en-US" sz="1000" dirty="0">
-                <a:solidFill>
-                  <a:srgbClr val="64748B"/>
-                </a:solidFill>
-                <a:latin typeface="Calibri" pitchFamily="34" charset="0"/>
-                <a:ea typeface="Calibri" pitchFamily="34" charset="-122"/>
-                <a:cs typeface="Calibri" pitchFamily="34" charset="-120"/>
-              </a:rPr>
-              <a:t>zvolený transformer model</a:t>
-            </a:r>
-            <a:endParaRPr lang="en-US" sz="1000" dirty="0"/>
-          </a:p>
-        </p:txBody>
-      </p:sp>
-      <p:sp>
-        <p:nvSpPr>
-          <p:cNvPr id="14" name="Text 12"/>
-          <p:cNvSpPr/>
-          <p:nvPr/>
-        </p:nvSpPr>
-        <p:spPr>
-          <a:xfrm>
-            <a:off x="502920" y="3127248"/>
-            <a:ext cx="1920240" cy="457200"/>
+              <a:rPr lang="en-US" sz="1100" b="1" dirty="0" err="1">
+                <a:solidFill>
+                  <a:srgbClr val="1E293B"/>
+                </a:solidFill>
+                <a:latin typeface="Calibri" pitchFamily="34" charset="0"/>
+                <a:ea typeface="Calibri" pitchFamily="34" charset="-122"/>
+                <a:cs typeface="Calibri" pitchFamily="34" charset="-120"/>
+              </a:rPr>
+              <a:t>RoBERTa</a:t>
+            </a:r>
+            <a:r>
+              <a:rPr lang="en-US" sz="1100" b="1" dirty="0">
+                <a:solidFill>
+                  <a:srgbClr val="1E293B"/>
+                </a:solidFill>
+                <a:latin typeface="Calibri" pitchFamily="34" charset="0"/>
+                <a:ea typeface="Calibri" pitchFamily="34" charset="-122"/>
+                <a:cs typeface="Calibri" pitchFamily="34" charset="-120"/>
+              </a:rPr>
+              <a:t> base</a:t>
+            </a:r>
+            <a:endParaRPr lang="en-US" sz="1100" dirty="0"/>
+          </a:p>
+        </p:txBody>
+      </p:sp>
+      <p:sp>
+        <p:nvSpPr>
+          <p:cNvPr id="13" name="Text 11"/>
+          <p:cNvSpPr/>
+          <p:nvPr/>
+        </p:nvSpPr>
+        <p:spPr>
+          <a:xfrm>
+            <a:off x="2468880" y="2578608"/>
+            <a:ext cx="1737360" cy="457200"/>
           </a:xfrm>
           <a:prstGeom prst="rect">
             <a:avLst/>
@@ -3613,30 +3719,30 @@
               <a:buNone/>
             </a:pPr>
             <a:r>
-              <a:rPr lang="en-US" sz="1100" b="1" dirty="0">
-                <a:solidFill>
-                  <a:srgbClr val="1E293B"/>
-                </a:solidFill>
-                <a:latin typeface="Calibri" pitchFamily="34" charset="0"/>
-                <a:ea typeface="Calibri" pitchFamily="34" charset="-122"/>
-                <a:cs typeface="Calibri" pitchFamily="34" charset="-120"/>
-              </a:rPr>
-              <a:t>⚡ FastAPI</a:t>
-            </a:r>
-            <a:endParaRPr lang="en-US" sz="1100" dirty="0"/>
-          </a:p>
-        </p:txBody>
-      </p:sp>
-      <p:sp>
-        <p:nvSpPr>
-          <p:cNvPr id="15" name="Text 13"/>
-          <p:cNvSpPr/>
-          <p:nvPr/>
-        </p:nvSpPr>
-        <p:spPr>
-          <a:xfrm>
-            <a:off x="2468880" y="3127248"/>
-            <a:ext cx="1737360" cy="457200"/>
+              <a:rPr lang="en-US" sz="1000" dirty="0">
+                <a:solidFill>
+                  <a:srgbClr val="64748B"/>
+                </a:solidFill>
+                <a:latin typeface="Calibri" pitchFamily="34" charset="0"/>
+                <a:ea typeface="Calibri" pitchFamily="34" charset="-122"/>
+                <a:cs typeface="Calibri" pitchFamily="34" charset="-120"/>
+              </a:rPr>
+              <a:t>zvolený transformer model</a:t>
+            </a:r>
+            <a:endParaRPr lang="en-US" sz="1000" dirty="0"/>
+          </a:p>
+        </p:txBody>
+      </p:sp>
+      <p:sp>
+        <p:nvSpPr>
+          <p:cNvPr id="14" name="Text 12"/>
+          <p:cNvSpPr/>
+          <p:nvPr/>
+        </p:nvSpPr>
+        <p:spPr>
+          <a:xfrm>
+            <a:off x="502920" y="3127248"/>
+            <a:ext cx="1920240" cy="457200"/>
           </a:xfrm>
           <a:prstGeom prst="rect">
             <a:avLst/>
@@ -3652,30 +3758,30 @@
               <a:buNone/>
             </a:pPr>
             <a:r>
-              <a:rPr lang="en-US" sz="1000" dirty="0">
-                <a:solidFill>
-                  <a:srgbClr val="64748B"/>
-                </a:solidFill>
-                <a:latin typeface="Calibri" pitchFamily="34" charset="0"/>
-                <a:ea typeface="Calibri" pitchFamily="34" charset="-122"/>
-                <a:cs typeface="Calibri" pitchFamily="34" charset="-120"/>
-              </a:rPr>
-              <a:t>REST API framework</a:t>
-            </a:r>
-            <a:endParaRPr lang="en-US" sz="1000" dirty="0"/>
-          </a:p>
-        </p:txBody>
-      </p:sp>
-      <p:sp>
-        <p:nvSpPr>
-          <p:cNvPr id="16" name="Text 14"/>
-          <p:cNvSpPr/>
-          <p:nvPr/>
-        </p:nvSpPr>
-        <p:spPr>
-          <a:xfrm>
-            <a:off x="502920" y="3675888"/>
-            <a:ext cx="1920240" cy="457200"/>
+              <a:rPr lang="en-US" sz="1100" b="1" dirty="0" err="1">
+                <a:solidFill>
+                  <a:srgbClr val="1E293B"/>
+                </a:solidFill>
+                <a:latin typeface="Calibri" pitchFamily="34" charset="0"/>
+                <a:ea typeface="Calibri" pitchFamily="34" charset="-122"/>
+                <a:cs typeface="Calibri" pitchFamily="34" charset="-120"/>
+              </a:rPr>
+              <a:t>FastAPI</a:t>
+            </a:r>
+            <a:endParaRPr lang="en-US" sz="1100" dirty="0"/>
+          </a:p>
+        </p:txBody>
+      </p:sp>
+      <p:sp>
+        <p:nvSpPr>
+          <p:cNvPr id="15" name="Text 13"/>
+          <p:cNvSpPr/>
+          <p:nvPr/>
+        </p:nvSpPr>
+        <p:spPr>
+          <a:xfrm>
+            <a:off x="2468880" y="3127248"/>
+            <a:ext cx="1737360" cy="457200"/>
           </a:xfrm>
           <a:prstGeom prst="rect">
             <a:avLst/>
@@ -3691,30 +3797,30 @@
               <a:buNone/>
             </a:pPr>
             <a:r>
-              <a:rPr lang="en-US" sz="1100" b="1" dirty="0">
-                <a:solidFill>
-                  <a:srgbClr val="1E293B"/>
-                </a:solidFill>
-                <a:latin typeface="Calibri" pitchFamily="34" charset="0"/>
-                <a:ea typeface="Calibri" pitchFamily="34" charset="-122"/>
-                <a:cs typeface="Calibri" pitchFamily="34" charset="-120"/>
-              </a:rPr>
-              <a:t>💾 SQLite</a:t>
-            </a:r>
-            <a:endParaRPr lang="en-US" sz="1100" dirty="0"/>
-          </a:p>
-        </p:txBody>
-      </p:sp>
-      <p:sp>
-        <p:nvSpPr>
-          <p:cNvPr id="17" name="Text 15"/>
-          <p:cNvSpPr/>
-          <p:nvPr/>
-        </p:nvSpPr>
-        <p:spPr>
-          <a:xfrm>
-            <a:off x="2468880" y="3675888"/>
-            <a:ext cx="1737360" cy="457200"/>
+              <a:rPr lang="en-US" sz="1000" dirty="0">
+                <a:solidFill>
+                  <a:srgbClr val="64748B"/>
+                </a:solidFill>
+                <a:latin typeface="Calibri" pitchFamily="34" charset="0"/>
+                <a:ea typeface="Calibri" pitchFamily="34" charset="-122"/>
+                <a:cs typeface="Calibri" pitchFamily="34" charset="-120"/>
+              </a:rPr>
+              <a:t>REST API framework</a:t>
+            </a:r>
+            <a:endParaRPr lang="en-US" sz="1000" dirty="0"/>
+          </a:p>
+        </p:txBody>
+      </p:sp>
+      <p:sp>
+        <p:nvSpPr>
+          <p:cNvPr id="16" name="Text 14"/>
+          <p:cNvSpPr/>
+          <p:nvPr/>
+        </p:nvSpPr>
+        <p:spPr>
+          <a:xfrm>
+            <a:off x="502920" y="3675888"/>
+            <a:ext cx="1920240" cy="457200"/>
           </a:xfrm>
           <a:prstGeom prst="rect">
             <a:avLst/>
@@ -3730,30 +3836,30 @@
               <a:buNone/>
             </a:pPr>
             <a:r>
-              <a:rPr lang="en-US" sz="1000" dirty="0">
-                <a:solidFill>
-                  <a:srgbClr val="64748B"/>
-                </a:solidFill>
-                <a:latin typeface="Calibri" pitchFamily="34" charset="0"/>
-                <a:ea typeface="Calibri" pitchFamily="34" charset="-122"/>
-                <a:cs typeface="Calibri" pitchFamily="34" charset="-120"/>
-              </a:rPr>
-              <a:t>databáze logů</a:t>
-            </a:r>
-            <a:endParaRPr lang="en-US" sz="1000" dirty="0"/>
-          </a:p>
-        </p:txBody>
-      </p:sp>
-      <p:sp>
-        <p:nvSpPr>
-          <p:cNvPr id="18" name="Text 16"/>
-          <p:cNvSpPr/>
-          <p:nvPr/>
-        </p:nvSpPr>
-        <p:spPr>
-          <a:xfrm>
-            <a:off x="502920" y="4224528"/>
-            <a:ext cx="1920240" cy="457200"/>
+              <a:rPr lang="en-US" sz="1100" b="1" dirty="0">
+                <a:solidFill>
+                  <a:srgbClr val="1E293B"/>
+                </a:solidFill>
+                <a:latin typeface="Calibri" pitchFamily="34" charset="0"/>
+                <a:ea typeface="Calibri" pitchFamily="34" charset="-122"/>
+                <a:cs typeface="Calibri" pitchFamily="34" charset="-120"/>
+              </a:rPr>
+              <a:t>SQLite</a:t>
+            </a:r>
+            <a:endParaRPr lang="en-US" sz="1100" dirty="0"/>
+          </a:p>
+        </p:txBody>
+      </p:sp>
+      <p:sp>
+        <p:nvSpPr>
+          <p:cNvPr id="17" name="Text 15"/>
+          <p:cNvSpPr/>
+          <p:nvPr/>
+        </p:nvSpPr>
+        <p:spPr>
+          <a:xfrm>
+            <a:off x="2468880" y="3675888"/>
+            <a:ext cx="1737360" cy="457200"/>
           </a:xfrm>
           <a:prstGeom prst="rect">
             <a:avLst/>
@@ -3769,6 +3875,45 @@
               <a:buNone/>
             </a:pPr>
             <a:r>
+              <a:rPr lang="en-US" sz="1000" dirty="0">
+                <a:solidFill>
+                  <a:srgbClr val="64748B"/>
+                </a:solidFill>
+                <a:latin typeface="Calibri" pitchFamily="34" charset="0"/>
+                <a:ea typeface="Calibri" pitchFamily="34" charset="-122"/>
+                <a:cs typeface="Calibri" pitchFamily="34" charset="-120"/>
+              </a:rPr>
+              <a:t>databáze logů</a:t>
+            </a:r>
+            <a:endParaRPr lang="en-US" sz="1000" dirty="0"/>
+          </a:p>
+        </p:txBody>
+      </p:sp>
+      <p:sp>
+        <p:nvSpPr>
+          <p:cNvPr id="18" name="Text 16"/>
+          <p:cNvSpPr/>
+          <p:nvPr/>
+        </p:nvSpPr>
+        <p:spPr>
+          <a:xfrm>
+            <a:off x="502920" y="4224528"/>
+            <a:ext cx="1920240" cy="457200"/>
+          </a:xfrm>
+          <a:prstGeom prst="rect">
+            <a:avLst/>
+          </a:prstGeom>
+          <a:noFill/>
+          <a:ln/>
+        </p:spPr>
+        <p:txBody>
+          <a:bodyPr wrap="square" rtlCol="0" anchor="ctr"/>
+          <a:lstStyle/>
+          <a:p>
+            <a:pPr marL="0" indent="0">
+              <a:buNone/>
+            </a:pPr>
+            <a:r>
               <a:rPr lang="en-US" sz="1100" b="1" dirty="0">
                 <a:solidFill>
                   <a:srgbClr val="1E293B"/>
@@ -3777,7 +3922,7 @@
                 <a:ea typeface="Calibri" pitchFamily="34" charset="-122"/>
                 <a:cs typeface="Calibri" pitchFamily="34" charset="-120"/>
               </a:rPr>
-              <a:t>📊 3 datasety</a:t>
+              <a:t>3 datasety</a:t>
             </a:r>
             <a:endParaRPr lang="en-US" sz="1100" dirty="0"/>
           </a:p>
@@ -4826,6 +4971,186 @@
           </a:p>
         </p:txBody>
       </p:sp>
+      <p:pic>
+        <p:nvPicPr>
+          <p:cNvPr id="47" name="Obrázek 46" descr="Python (programming language) - Wikipedia">
+            <a:extLst>
+              <a:ext uri="{FF2B5EF4-FFF2-40B4-BE49-F238E27FC236}">
+                <a16:creationId xmlns:a16="http://schemas.microsoft.com/office/drawing/2014/main" id="{54E7655D-D296-D0B7-6883-B3954DE71B81}"/>
+              </a:ext>
+            </a:extLst>
+          </p:cNvPr>
+          <p:cNvPicPr>
+            <a:picLocks noChangeAspect="1"/>
+          </p:cNvPicPr>
+          <p:nvPr/>
+        </p:nvPicPr>
+        <p:blipFill>
+          <a:blip r:embed="rId3"/>
+          <a:stretch>
+            <a:fillRect/>
+          </a:stretch>
+        </p:blipFill>
+        <p:spPr>
+          <a:xfrm>
+            <a:off x="1778636" y="1536192"/>
+            <a:ext cx="364109" cy="364109"/>
+          </a:xfrm>
+          <a:prstGeom prst="rect">
+            <a:avLst/>
+          </a:prstGeom>
+        </p:spPr>
+      </p:pic>
+      <p:pic>
+        <p:nvPicPr>
+          <p:cNvPr id="48" name="Obrázek 47" descr="Introduction with Hugging Face.. If you are new in Deep Learning Field… |  by Shadowshukla | AI Advances">
+            <a:extLst>
+              <a:ext uri="{FF2B5EF4-FFF2-40B4-BE49-F238E27FC236}">
+                <a16:creationId xmlns:a16="http://schemas.microsoft.com/office/drawing/2014/main" id="{34320757-EE26-FEE0-3E0C-6453CD66AA87}"/>
+              </a:ext>
+            </a:extLst>
+          </p:cNvPr>
+          <p:cNvPicPr>
+            <a:picLocks noChangeAspect="1"/>
+          </p:cNvPicPr>
+          <p:nvPr/>
+        </p:nvPicPr>
+        <p:blipFill>
+          <a:blip r:embed="rId4"/>
+          <a:stretch>
+            <a:fillRect/>
+          </a:stretch>
+        </p:blipFill>
+        <p:spPr>
+          <a:xfrm>
+            <a:off x="1778636" y="2076513"/>
+            <a:ext cx="364109" cy="364109"/>
+          </a:xfrm>
+          <a:prstGeom prst="rect">
+            <a:avLst/>
+          </a:prstGeom>
+        </p:spPr>
+      </p:pic>
+      <p:pic>
+        <p:nvPicPr>
+          <p:cNvPr id="54" name="Obrázek 53">
+            <a:extLst>
+              <a:ext uri="{FF2B5EF4-FFF2-40B4-BE49-F238E27FC236}">
+                <a16:creationId xmlns:a16="http://schemas.microsoft.com/office/drawing/2014/main" id="{82002A51-DA0E-CDC6-172C-A83600D814FF}"/>
+              </a:ext>
+            </a:extLst>
+          </p:cNvPr>
+          <p:cNvPicPr>
+            <a:picLocks noChangeAspect="1"/>
+          </p:cNvPicPr>
+          <p:nvPr/>
+        </p:nvPicPr>
+        <p:blipFill>
+          <a:blip r:embed="rId5"/>
+          <a:stretch>
+            <a:fillRect/>
+          </a:stretch>
+        </p:blipFill>
+        <p:spPr>
+          <a:xfrm>
+            <a:off x="1771714" y="3166872"/>
+            <a:ext cx="377952" cy="377952"/>
+          </a:xfrm>
+          <a:prstGeom prst="rect">
+            <a:avLst/>
+          </a:prstGeom>
+        </p:spPr>
+      </p:pic>
+      <p:pic>
+        <p:nvPicPr>
+          <p:cNvPr id="56" name="Obrázek 55">
+            <a:extLst>
+              <a:ext uri="{FF2B5EF4-FFF2-40B4-BE49-F238E27FC236}">
+                <a16:creationId xmlns:a16="http://schemas.microsoft.com/office/drawing/2014/main" id="{83394F17-10FE-9CF1-4AA7-E599D764C387}"/>
+              </a:ext>
+            </a:extLst>
+          </p:cNvPr>
+          <p:cNvPicPr>
+            <a:picLocks noChangeAspect="1"/>
+          </p:cNvPicPr>
+          <p:nvPr/>
+        </p:nvPicPr>
+        <p:blipFill>
+          <a:blip r:embed="rId6"/>
+          <a:stretch>
+            <a:fillRect/>
+          </a:stretch>
+        </p:blipFill>
+        <p:spPr>
+          <a:xfrm>
+            <a:off x="1741234" y="3739897"/>
+            <a:ext cx="438912" cy="438912"/>
+          </a:xfrm>
+          <a:prstGeom prst="rect">
+            <a:avLst/>
+          </a:prstGeom>
+        </p:spPr>
+      </p:pic>
+      <p:pic>
+        <p:nvPicPr>
+          <p:cNvPr id="59" name="Obrázek 58" descr="Vector image of blue and gray database symbol | Free SVG">
+            <a:extLst>
+              <a:ext uri="{FF2B5EF4-FFF2-40B4-BE49-F238E27FC236}">
+                <a16:creationId xmlns:a16="http://schemas.microsoft.com/office/drawing/2014/main" id="{2F9FA12A-0BFE-C506-2B37-017D1B868739}"/>
+              </a:ext>
+            </a:extLst>
+          </p:cNvPr>
+          <p:cNvPicPr>
+            <a:picLocks noChangeAspect="1"/>
+          </p:cNvPicPr>
+          <p:nvPr/>
+        </p:nvPicPr>
+        <p:blipFill>
+          <a:blip r:embed="rId7"/>
+          <a:stretch>
+            <a:fillRect/>
+          </a:stretch>
+        </p:blipFill>
+        <p:spPr>
+          <a:xfrm>
+            <a:off x="1741234" y="4239197"/>
+            <a:ext cx="438912" cy="438912"/>
+          </a:xfrm>
+          <a:prstGeom prst="rect">
+            <a:avLst/>
+          </a:prstGeom>
+        </p:spPr>
+      </p:pic>
+      <p:pic>
+        <p:nvPicPr>
+          <p:cNvPr id="60" name="Obrázek 59" descr="Transformer Model Icons - Free SVG &amp; PNG Transformer Model Images - Noun  Project">
+            <a:extLst>
+              <a:ext uri="{FF2B5EF4-FFF2-40B4-BE49-F238E27FC236}">
+                <a16:creationId xmlns:a16="http://schemas.microsoft.com/office/drawing/2014/main" id="{C08756B9-B157-AA47-E194-0DBD9F800426}"/>
+              </a:ext>
+            </a:extLst>
+          </p:cNvPr>
+          <p:cNvPicPr>
+            <a:picLocks noChangeAspect="1"/>
+          </p:cNvPicPr>
+          <p:nvPr/>
+        </p:nvPicPr>
+        <p:blipFill>
+          <a:blip r:embed="rId8"/>
+          <a:stretch>
+            <a:fillRect/>
+          </a:stretch>
+        </p:blipFill>
+        <p:spPr>
+          <a:xfrm>
+            <a:off x="1670669" y="2519774"/>
+            <a:ext cx="580042" cy="580042"/>
+          </a:xfrm>
+          <a:prstGeom prst="rect">
+            <a:avLst/>
+          </a:prstGeom>
+        </p:spPr>
+      </p:pic>
     </p:spTree>
   </p:cSld>
   <p:clrMapOvr>
@@ -5478,7 +5803,7 @@
           <p:nvPr>
             <p:extLst>
               <p:ext uri="{D42A27DB-BD31-4B8C-83A1-F6EECF244321}">
-                <p14:modId xmlns:p14="http://schemas.microsoft.com/office/powerpoint/2010/main" val="1703406995"/>
+                <p14:modId xmlns:p14="http://schemas.microsoft.com/office/powerpoint/2010/main" val="453172864"/>
               </p:ext>
             </p:extLst>
           </p:nvPr>
@@ -5946,6 +6271,33 @@
                         <a:buNone/>
                       </a:pPr>
                       <a:r>
+                        <a:rPr lang="cs-CZ" sz="1100" dirty="0">
+                          <a:solidFill>
+                            <a:srgbClr val="1E293B"/>
+                          </a:solidFill>
+                          <a:latin typeface="Calibri" pitchFamily="34" charset="0"/>
+                          <a:ea typeface="Calibri" pitchFamily="34" charset="-122"/>
+                          <a:cs typeface="Calibri" pitchFamily="34" charset="-120"/>
+                        </a:rPr>
+                        <a:t>Nepoměr tříd, až 76% neutrálních sentimentů</a:t>
+                      </a:r>
+                    </a:p>
+                    <a:p>
+                      <a:pPr marL="0" indent="0">
+                        <a:buNone/>
+                      </a:pPr>
+                      <a:r>
+                        <a:rPr lang="en-US" sz="1100" dirty="0" err="1">
+                          <a:solidFill>
+                            <a:srgbClr val="1E293B"/>
+                          </a:solidFill>
+                          <a:latin typeface="Calibri" pitchFamily="34" charset="0"/>
+                          <a:ea typeface="Calibri" pitchFamily="34" charset="-122"/>
+                          <a:cs typeface="Calibri" pitchFamily="34" charset="-120"/>
+                        </a:rPr>
+                        <a:t>positive→neutral</a:t>
+                      </a:r>
+                      <a:r>
                         <a:rPr lang="en-US" sz="1100" dirty="0">
                           <a:solidFill>
                             <a:srgbClr val="1E293B"/>
@@ -5954,7 +6306,29 @@
                           <a:ea typeface="Calibri" pitchFamily="34" charset="-122"/>
                           <a:cs typeface="Calibri" pitchFamily="34" charset="-120"/>
                         </a:rPr>
-                        <a:t>positive→neutral, negative→neutral</a:t>
+                        <a:t>, </a:t>
+                      </a:r>
+                      <a:r>
+                        <a:rPr lang="en-US" sz="1100" dirty="0" err="1">
+                          <a:solidFill>
+                            <a:srgbClr val="1E293B"/>
+                          </a:solidFill>
+                          <a:latin typeface="Calibri" pitchFamily="34" charset="0"/>
+                          <a:ea typeface="Calibri" pitchFamily="34" charset="-122"/>
+                          <a:cs typeface="Calibri" pitchFamily="34" charset="-120"/>
+                        </a:rPr>
+                        <a:t>negative→neutral</a:t>
+                      </a:r>
+                      <a:r>
+                        <a:rPr lang="cs-CZ" sz="1100" dirty="0">
+                          <a:solidFill>
+                            <a:srgbClr val="1E293B"/>
+                          </a:solidFill>
+                          <a:latin typeface="Calibri" pitchFamily="34" charset="0"/>
+                          <a:ea typeface="Calibri" pitchFamily="34" charset="-122"/>
+                          <a:cs typeface="Calibri" pitchFamily="34" charset="-120"/>
+                        </a:rPr>
+                        <a:t> </a:t>
                       </a:r>
                       <a:endParaRPr lang="en-US" sz="1100" dirty="0">
                         <a:latin typeface="Calibri" charset="0"/>
@@ -6225,6 +6599,33 @@
                         <a:buNone/>
                       </a:pPr>
                       <a:r>
+                        <a:rPr lang="cs-CZ" sz="1100" dirty="0">
+                          <a:solidFill>
+                            <a:srgbClr val="1E293B"/>
+                          </a:solidFill>
+                          <a:latin typeface="Calibri" pitchFamily="34" charset="0"/>
+                          <a:ea typeface="Calibri" pitchFamily="34" charset="-122"/>
+                          <a:cs typeface="Calibri" pitchFamily="34" charset="-120"/>
+                        </a:rPr>
+                        <a:t>Nepřesné určování neutrálních sentimentů</a:t>
+                      </a:r>
+                    </a:p>
+                    <a:p>
+                      <a:pPr marL="0" indent="0">
+                        <a:buNone/>
+                      </a:pPr>
+                      <a:r>
+                        <a:rPr lang="en-US" sz="1100" dirty="0" err="1">
+                          <a:solidFill>
+                            <a:srgbClr val="1E293B"/>
+                          </a:solidFill>
+                          <a:latin typeface="Calibri" pitchFamily="34" charset="0"/>
+                          <a:ea typeface="Calibri" pitchFamily="34" charset="-122"/>
+                          <a:cs typeface="Calibri" pitchFamily="34" charset="-120"/>
+                        </a:rPr>
+                        <a:t>neutral→positive</a:t>
+                      </a:r>
+                      <a:r>
                         <a:rPr lang="en-US" sz="1100" dirty="0">
                           <a:solidFill>
                             <a:srgbClr val="1E293B"/>
@@ -6233,7 +6634,7 @@
                           <a:ea typeface="Calibri" pitchFamily="34" charset="-122"/>
                           <a:cs typeface="Calibri" pitchFamily="34" charset="-120"/>
                         </a:rPr>
-                        <a:t>neutral→positive (212×), neutral→negative</a:t>
+                        <a:t> (212×), neutral→negative</a:t>
                       </a:r>
                       <a:endParaRPr lang="en-US" sz="1100" dirty="0">
                         <a:latin typeface="Calibri" charset="0"/>
@@ -6504,6 +6905,33 @@
                         <a:buNone/>
                       </a:pPr>
                       <a:r>
+                        <a:rPr lang="cs-CZ" sz="1100" dirty="0">
+                          <a:solidFill>
+                            <a:srgbClr val="1E293B"/>
+                          </a:solidFill>
+                          <a:latin typeface="Calibri" pitchFamily="34" charset="0"/>
+                          <a:ea typeface="Calibri" pitchFamily="34" charset="-122"/>
+                          <a:cs typeface="Calibri" pitchFamily="34" charset="-120"/>
+                        </a:rPr>
+                        <a:t>Žádná zásadní chyba</a:t>
+                      </a:r>
+                    </a:p>
+                    <a:p>
+                      <a:pPr marL="0" indent="0">
+                        <a:buNone/>
+                      </a:pPr>
+                      <a:r>
+                        <a:rPr lang="en-US" sz="1100" dirty="0" err="1">
+                          <a:solidFill>
+                            <a:srgbClr val="1E293B"/>
+                          </a:solidFill>
+                          <a:latin typeface="Calibri" pitchFamily="34" charset="0"/>
+                          <a:ea typeface="Calibri" pitchFamily="34" charset="-122"/>
+                          <a:cs typeface="Calibri" pitchFamily="34" charset="-120"/>
+                        </a:rPr>
+                        <a:t>neutral→positive</a:t>
+                      </a:r>
+                      <a:r>
                         <a:rPr lang="en-US" sz="1100" dirty="0">
                           <a:solidFill>
                             <a:srgbClr val="1E293B"/>
@@ -6512,7 +6940,7 @@
                           <a:ea typeface="Calibri" pitchFamily="34" charset="-122"/>
                           <a:cs typeface="Calibri" pitchFamily="34" charset="-120"/>
                         </a:rPr>
-                        <a:t>neutral→positive (80×)</a:t>
+                        <a:t> (80×)</a:t>
                       </a:r>
                       <a:endParaRPr lang="en-US" sz="1100" dirty="0">
                         <a:latin typeface="Calibri" charset="0"/>
@@ -6824,8 +7252,8 @@
         </p:nvSpPr>
         <p:spPr>
           <a:xfrm>
-            <a:off x="457200" y="1051560"/>
-            <a:ext cx="3749040" cy="347472"/>
+            <a:off x="694944" y="1051560"/>
+            <a:ext cx="3511296" cy="347472"/>
           </a:xfrm>
           <a:prstGeom prst="rect">
             <a:avLst/>
@@ -6837,11 +7265,11 @@
           <a:bodyPr wrap="square" rtlCol="0" anchor="ctr"/>
           <a:lstStyle/>
           <a:p>
-            <a:pPr marL="0" indent="0">
+            <a:pPr marL="0" indent="0" algn="ctr">
               <a:buNone/>
             </a:pPr>
             <a:r>
-              <a:rPr lang="en-US" sz="1300" b="1" dirty="0">
+              <a:rPr lang="en-US" b="1" dirty="0" err="1">
                 <a:solidFill>
                   <a:srgbClr val="1E293B"/>
                 </a:solidFill>
@@ -6849,9 +7277,20 @@
                 <a:ea typeface="Calibri" pitchFamily="34" charset="-122"/>
                 <a:cs typeface="Calibri" pitchFamily="34" charset="-120"/>
               </a:rPr>
-              <a:t>✅  Splnění cíle práce</a:t>
-            </a:r>
-            <a:endParaRPr lang="en-US" sz="1300" dirty="0"/>
+              <a:t>Splnění</a:t>
+            </a:r>
+            <a:r>
+              <a:rPr lang="en-US" b="1" dirty="0">
+                <a:solidFill>
+                  <a:srgbClr val="1E293B"/>
+                </a:solidFill>
+                <a:latin typeface="Calibri" pitchFamily="34" charset="0"/>
+                <a:ea typeface="Calibri" pitchFamily="34" charset="-122"/>
+                <a:cs typeface="Calibri" pitchFamily="34" charset="-120"/>
+              </a:rPr>
+              <a:t> cíle práce</a:t>
+            </a:r>
+            <a:endParaRPr lang="en-US" dirty="0"/>
           </a:p>
         </p:txBody>
       </p:sp>
@@ -7484,8 +7923,8 @@
         </p:nvSpPr>
         <p:spPr>
           <a:xfrm>
-            <a:off x="4846320" y="1051560"/>
-            <a:ext cx="3840480" cy="347472"/>
+            <a:off x="5084064" y="1051560"/>
+            <a:ext cx="3602736" cy="347472"/>
           </a:xfrm>
           <a:prstGeom prst="rect">
             <a:avLst/>
@@ -7497,11 +7936,11 @@
           <a:bodyPr wrap="square" rtlCol="0" anchor="ctr"/>
           <a:lstStyle/>
           <a:p>
-            <a:pPr marL="0" indent="0">
+            <a:pPr marL="0" indent="0" algn="ctr">
               <a:buNone/>
             </a:pPr>
             <a:r>
-              <a:rPr lang="en-US" sz="1300" b="1" dirty="0">
+              <a:rPr lang="en-US" b="1" dirty="0" err="1">
                 <a:solidFill>
                   <a:srgbClr val="1E293B"/>
                 </a:solidFill>
@@ -7509,9 +7948,20 @@
                 <a:ea typeface="Calibri" pitchFamily="34" charset="-122"/>
                 <a:cs typeface="Calibri" pitchFamily="34" charset="-120"/>
               </a:rPr>
-              <a:t>🔭  Doporučení pro rozvoj</a:t>
-            </a:r>
-            <a:endParaRPr lang="en-US" sz="1300" dirty="0"/>
+              <a:t>Doporučení</a:t>
+            </a:r>
+            <a:r>
+              <a:rPr lang="en-US" b="1" dirty="0">
+                <a:solidFill>
+                  <a:srgbClr val="1E293B"/>
+                </a:solidFill>
+                <a:latin typeface="Calibri" pitchFamily="34" charset="0"/>
+                <a:ea typeface="Calibri" pitchFamily="34" charset="-122"/>
+                <a:cs typeface="Calibri" pitchFamily="34" charset="-120"/>
+              </a:rPr>
+              <a:t> pro rozvoj</a:t>
+            </a:r>
+            <a:endParaRPr lang="en-US" dirty="0"/>
           </a:p>
         </p:txBody>
       </p:sp>
@@ -8143,6 +8593,66 @@
           </a:p>
         </p:txBody>
       </p:sp>
+      <p:pic>
+        <p:nvPicPr>
+          <p:cNvPr id="55" name="Obrázek 54">
+            <a:extLst>
+              <a:ext uri="{FF2B5EF4-FFF2-40B4-BE49-F238E27FC236}">
+                <a16:creationId xmlns:a16="http://schemas.microsoft.com/office/drawing/2014/main" id="{7CF76C98-924A-D0A7-0B34-F00FFC891DE6}"/>
+              </a:ext>
+            </a:extLst>
+          </p:cNvPr>
+          <p:cNvPicPr>
+            <a:picLocks noChangeAspect="1"/>
+          </p:cNvPicPr>
+          <p:nvPr/>
+        </p:nvPicPr>
+        <p:blipFill>
+          <a:blip r:embed="rId3"/>
+          <a:stretch>
+            <a:fillRect/>
+          </a:stretch>
+        </p:blipFill>
+        <p:spPr>
+          <a:xfrm>
+            <a:off x="4786833" y="989488"/>
+            <a:ext cx="434010" cy="405705"/>
+          </a:xfrm>
+          <a:prstGeom prst="rect">
+            <a:avLst/>
+          </a:prstGeom>
+        </p:spPr>
+      </p:pic>
+      <p:pic>
+        <p:nvPicPr>
+          <p:cNvPr id="57" name="Obrázek 56">
+            <a:extLst>
+              <a:ext uri="{FF2B5EF4-FFF2-40B4-BE49-F238E27FC236}">
+                <a16:creationId xmlns:a16="http://schemas.microsoft.com/office/drawing/2014/main" id="{380CD879-32D6-3973-AB54-BE23FDEFC157}"/>
+              </a:ext>
+            </a:extLst>
+          </p:cNvPr>
+          <p:cNvPicPr>
+            <a:picLocks noChangeAspect="1"/>
+          </p:cNvPicPr>
+          <p:nvPr/>
+        </p:nvPicPr>
+        <p:blipFill>
+          <a:blip r:embed="rId4"/>
+          <a:stretch>
+            <a:fillRect/>
+          </a:stretch>
+        </p:blipFill>
+        <p:spPr>
+          <a:xfrm>
+            <a:off x="337564" y="960120"/>
+            <a:ext cx="464440" cy="464440"/>
+          </a:xfrm>
+          <a:prstGeom prst="rect">
+            <a:avLst/>
+          </a:prstGeom>
+        </p:spPr>
+      </p:pic>
     </p:spTree>
   </p:cSld>
   <p:clrMapOvr>

--- a/obhajoba_prezentace.pptx
+++ b/obhajoba_prezentace.pptx
@@ -5507,15 +5507,14 @@
               <a:buNone/>
             </a:pPr>
             <a:r>
-              <a:rPr lang="en-US" sz="2800" b="1" dirty="0">
+              <a:rPr lang="cs-CZ" sz="2800" b="1" dirty="0">
                 <a:solidFill>
                   <a:srgbClr val="14B8A6"/>
                 </a:solidFill>
                 <a:latin typeface="Calibri" pitchFamily="34" charset="0"/>
-                <a:ea typeface="Calibri" pitchFamily="34" charset="-122"/>
-                <a:cs typeface="Calibri" pitchFamily="34" charset="-120"/>
-              </a:rPr>
-              <a:t>0,9152</a:t>
+                <a:cs typeface="Calibri" pitchFamily="34" charset="-120"/>
+              </a:rPr>
+              <a:t>9,41 %</a:t>
             </a:r>
             <a:endParaRPr lang="en-US" sz="2800" dirty="0"/>
           </a:p>
@@ -5546,15 +5545,34 @@
               <a:buNone/>
             </a:pPr>
             <a:r>
-              <a:rPr lang="en-US" sz="1050" b="1" dirty="0">
+              <a:rPr lang="cs-CZ" sz="1050" b="1" dirty="0">
                 <a:solidFill>
                   <a:srgbClr val="FFFFFF"/>
                 </a:solidFill>
                 <a:latin typeface="Calibri" pitchFamily="34" charset="0"/>
-                <a:ea typeface="Calibri" pitchFamily="34" charset="-122"/>
-                <a:cs typeface="Calibri" pitchFamily="34" charset="-120"/>
-              </a:rPr>
-              <a:t>F1-score finální verze</a:t>
+                <a:cs typeface="Calibri" pitchFamily="34" charset="-120"/>
+              </a:rPr>
+              <a:t>Došlo ke zlepšení </a:t>
+            </a:r>
+            <a:r>
+              <a:rPr lang="cs-CZ" sz="1050" b="1" dirty="0" err="1">
+                <a:solidFill>
+                  <a:srgbClr val="FFFFFF"/>
+                </a:solidFill>
+                <a:latin typeface="Calibri" pitchFamily="34" charset="0"/>
+                <a:cs typeface="Calibri" pitchFamily="34" charset="-120"/>
+              </a:rPr>
+              <a:t>accuracy</a:t>
+            </a:r>
+            <a:r>
+              <a:rPr lang="cs-CZ" sz="1050" b="1" dirty="0">
+                <a:solidFill>
+                  <a:srgbClr val="FFFFFF"/>
+                </a:solidFill>
+                <a:latin typeface="Calibri" pitchFamily="34" charset="0"/>
+                <a:cs typeface="Calibri" pitchFamily="34" charset="-120"/>
+              </a:rPr>
+              <a:t> z první verze modelu</a:t>
             </a:r>
             <a:endParaRPr lang="en-US" sz="1050" dirty="0"/>
           </a:p>
@@ -5585,15 +5603,14 @@
               <a:buNone/>
             </a:pPr>
             <a:r>
-              <a:rPr lang="en-US" sz="900" dirty="0">
+              <a:rPr lang="cs-CZ" sz="900" dirty="0">
                 <a:solidFill>
                   <a:srgbClr val="64748B"/>
                 </a:solidFill>
                 <a:latin typeface="Calibri" pitchFamily="34" charset="0"/>
-                <a:ea typeface="Calibri" pitchFamily="34" charset="-122"/>
-                <a:cs typeface="Calibri" pitchFamily="34" charset="-120"/>
-              </a:rPr>
-              <a:t>vyvážená metrika pro 3 třídy sentimentu</a:t>
+                <a:cs typeface="Calibri" pitchFamily="34" charset="-120"/>
+              </a:rPr>
+              <a:t>Z první verze 83,41 % na finální verzi 92,82 %</a:t>
             </a:r>
             <a:endParaRPr lang="en-US" sz="900" dirty="0"/>
           </a:p>

--- a/obhajoba_prezentace.pptx
+++ b/obhajoba_prezentace.pptx
@@ -1992,11 +1992,12 @@
           <a:bodyPr wrap="square" rtlCol="0" anchor="t"/>
           <a:lstStyle/>
           <a:p>
-            <a:pPr marL="0" indent="0">
-              <a:buNone/>
+            <a:pPr marL="171450" indent="-171450">
+              <a:buFont typeface="Wingdings" panose="05000000000000000000" pitchFamily="2" charset="2"/>
+              <a:buChar char="§"/>
             </a:pPr>
             <a:r>
-              <a:rPr lang="en-US" sz="1100" dirty="0">
+              <a:rPr lang="en-US" sz="1400" dirty="0" err="1">
                 <a:solidFill>
                   <a:srgbClr val="64748B"/>
                 </a:solidFill>
@@ -2004,9 +2005,220 @@
                 <a:ea typeface="Calibri" pitchFamily="34" charset="-122"/>
                 <a:cs typeface="Calibri" pitchFamily="34" charset="-120"/>
               </a:rPr>
-              <a:t>Organizace každodenně zpracovávají tisíce chatových interakcí se zákazníky. Ruční analýza je neúnosná.</a:t>
-            </a:r>
-            <a:endParaRPr lang="en-US" sz="1100" dirty="0"/>
+              <a:t>Organizace</a:t>
+            </a:r>
+            <a:r>
+              <a:rPr lang="en-US" sz="1400" dirty="0">
+                <a:solidFill>
+                  <a:srgbClr val="64748B"/>
+                </a:solidFill>
+                <a:latin typeface="Calibri" pitchFamily="34" charset="0"/>
+                <a:ea typeface="Calibri" pitchFamily="34" charset="-122"/>
+                <a:cs typeface="Calibri" pitchFamily="34" charset="-120"/>
+              </a:rPr>
+              <a:t> </a:t>
+            </a:r>
+            <a:r>
+              <a:rPr lang="en-US" sz="1400" dirty="0" err="1">
+                <a:solidFill>
+                  <a:srgbClr val="64748B"/>
+                </a:solidFill>
+                <a:latin typeface="Calibri" pitchFamily="34" charset="0"/>
+                <a:ea typeface="Calibri" pitchFamily="34" charset="-122"/>
+                <a:cs typeface="Calibri" pitchFamily="34" charset="-120"/>
+              </a:rPr>
+              <a:t>každodenně</a:t>
+            </a:r>
+            <a:r>
+              <a:rPr lang="en-US" sz="1400" dirty="0">
+                <a:solidFill>
+                  <a:srgbClr val="64748B"/>
+                </a:solidFill>
+                <a:latin typeface="Calibri" pitchFamily="34" charset="0"/>
+                <a:ea typeface="Calibri" pitchFamily="34" charset="-122"/>
+                <a:cs typeface="Calibri" pitchFamily="34" charset="-120"/>
+              </a:rPr>
+              <a:t> </a:t>
+            </a:r>
+            <a:r>
+              <a:rPr lang="en-US" sz="1400" dirty="0" err="1">
+                <a:solidFill>
+                  <a:srgbClr val="64748B"/>
+                </a:solidFill>
+                <a:latin typeface="Calibri" pitchFamily="34" charset="0"/>
+                <a:ea typeface="Calibri" pitchFamily="34" charset="-122"/>
+                <a:cs typeface="Calibri" pitchFamily="34" charset="-120"/>
+              </a:rPr>
+              <a:t>zpracovávají</a:t>
+            </a:r>
+            <a:r>
+              <a:rPr lang="en-US" sz="1400" dirty="0">
+                <a:solidFill>
+                  <a:srgbClr val="64748B"/>
+                </a:solidFill>
+                <a:latin typeface="Calibri" pitchFamily="34" charset="0"/>
+                <a:ea typeface="Calibri" pitchFamily="34" charset="-122"/>
+                <a:cs typeface="Calibri" pitchFamily="34" charset="-120"/>
+              </a:rPr>
+              <a:t> </a:t>
+            </a:r>
+            <a:r>
+              <a:rPr lang="en-US" sz="1400" dirty="0" err="1">
+                <a:solidFill>
+                  <a:srgbClr val="64748B"/>
+                </a:solidFill>
+                <a:latin typeface="Calibri" pitchFamily="34" charset="0"/>
+                <a:ea typeface="Calibri" pitchFamily="34" charset="-122"/>
+                <a:cs typeface="Calibri" pitchFamily="34" charset="-120"/>
+              </a:rPr>
+              <a:t>tisíce</a:t>
+            </a:r>
+            <a:r>
+              <a:rPr lang="en-US" sz="1400" dirty="0">
+                <a:solidFill>
+                  <a:srgbClr val="64748B"/>
+                </a:solidFill>
+                <a:latin typeface="Calibri" pitchFamily="34" charset="0"/>
+                <a:ea typeface="Calibri" pitchFamily="34" charset="-122"/>
+                <a:cs typeface="Calibri" pitchFamily="34" charset="-120"/>
+              </a:rPr>
+              <a:t> </a:t>
+            </a:r>
+            <a:r>
+              <a:rPr lang="en-US" sz="1400" dirty="0" err="1">
+                <a:solidFill>
+                  <a:srgbClr val="64748B"/>
+                </a:solidFill>
+                <a:latin typeface="Calibri" pitchFamily="34" charset="0"/>
+                <a:ea typeface="Calibri" pitchFamily="34" charset="-122"/>
+                <a:cs typeface="Calibri" pitchFamily="34" charset="-120"/>
+              </a:rPr>
+              <a:t>chatových</a:t>
+            </a:r>
+            <a:r>
+              <a:rPr lang="en-US" sz="1400" dirty="0">
+                <a:solidFill>
+                  <a:srgbClr val="64748B"/>
+                </a:solidFill>
+                <a:latin typeface="Calibri" pitchFamily="34" charset="0"/>
+                <a:ea typeface="Calibri" pitchFamily="34" charset="-122"/>
+                <a:cs typeface="Calibri" pitchFamily="34" charset="-120"/>
+              </a:rPr>
+              <a:t> </a:t>
+            </a:r>
+            <a:r>
+              <a:rPr lang="en-US" sz="1400" dirty="0" err="1">
+                <a:solidFill>
+                  <a:srgbClr val="64748B"/>
+                </a:solidFill>
+                <a:latin typeface="Calibri" pitchFamily="34" charset="0"/>
+                <a:ea typeface="Calibri" pitchFamily="34" charset="-122"/>
+                <a:cs typeface="Calibri" pitchFamily="34" charset="-120"/>
+              </a:rPr>
+              <a:t>interakcí</a:t>
+            </a:r>
+            <a:r>
+              <a:rPr lang="en-US" sz="1400" dirty="0">
+                <a:solidFill>
+                  <a:srgbClr val="64748B"/>
+                </a:solidFill>
+                <a:latin typeface="Calibri" pitchFamily="34" charset="0"/>
+                <a:ea typeface="Calibri" pitchFamily="34" charset="-122"/>
+                <a:cs typeface="Calibri" pitchFamily="34" charset="-120"/>
+              </a:rPr>
+              <a:t> se </a:t>
+            </a:r>
+            <a:r>
+              <a:rPr lang="en-US" sz="1400" dirty="0" err="1">
+                <a:solidFill>
+                  <a:srgbClr val="64748B"/>
+                </a:solidFill>
+                <a:latin typeface="Calibri" pitchFamily="34" charset="0"/>
+                <a:ea typeface="Calibri" pitchFamily="34" charset="-122"/>
+                <a:cs typeface="Calibri" pitchFamily="34" charset="-120"/>
+              </a:rPr>
+              <a:t>zákazníky</a:t>
+            </a:r>
+            <a:endParaRPr lang="cs-CZ" sz="1400" dirty="0">
+              <a:solidFill>
+                <a:srgbClr val="64748B"/>
+              </a:solidFill>
+              <a:latin typeface="Calibri" pitchFamily="34" charset="0"/>
+              <a:ea typeface="Calibri" pitchFamily="34" charset="-122"/>
+              <a:cs typeface="Calibri" pitchFamily="34" charset="-120"/>
+            </a:endParaRPr>
+          </a:p>
+          <a:p>
+            <a:endParaRPr lang="cs-CZ" sz="1400" dirty="0">
+              <a:solidFill>
+                <a:srgbClr val="64748B"/>
+              </a:solidFill>
+              <a:latin typeface="Calibri" pitchFamily="34" charset="0"/>
+              <a:ea typeface="Calibri" pitchFamily="34" charset="-122"/>
+              <a:cs typeface="Calibri" pitchFamily="34" charset="-120"/>
+            </a:endParaRPr>
+          </a:p>
+          <a:p>
+            <a:pPr marL="171450" indent="-171450">
+              <a:buFont typeface="Wingdings" panose="05000000000000000000" pitchFamily="2" charset="2"/>
+              <a:buChar char="§"/>
+            </a:pPr>
+            <a:r>
+              <a:rPr lang="en-US" sz="1400" dirty="0" err="1">
+                <a:solidFill>
+                  <a:srgbClr val="64748B"/>
+                </a:solidFill>
+                <a:latin typeface="Calibri" pitchFamily="34" charset="0"/>
+                <a:ea typeface="Calibri" pitchFamily="34" charset="-122"/>
+                <a:cs typeface="Calibri" pitchFamily="34" charset="-120"/>
+              </a:rPr>
+              <a:t>Ruční</a:t>
+            </a:r>
+            <a:r>
+              <a:rPr lang="en-US" sz="1400" dirty="0">
+                <a:solidFill>
+                  <a:srgbClr val="64748B"/>
+                </a:solidFill>
+                <a:latin typeface="Calibri" pitchFamily="34" charset="0"/>
+                <a:ea typeface="Calibri" pitchFamily="34" charset="-122"/>
+                <a:cs typeface="Calibri" pitchFamily="34" charset="-120"/>
+              </a:rPr>
+              <a:t> </a:t>
+            </a:r>
+            <a:r>
+              <a:rPr lang="en-US" sz="1400" dirty="0" err="1">
+                <a:solidFill>
+                  <a:srgbClr val="64748B"/>
+                </a:solidFill>
+                <a:latin typeface="Calibri" pitchFamily="34" charset="0"/>
+                <a:ea typeface="Calibri" pitchFamily="34" charset="-122"/>
+                <a:cs typeface="Calibri" pitchFamily="34" charset="-120"/>
+              </a:rPr>
+              <a:t>analýza</a:t>
+            </a:r>
+            <a:r>
+              <a:rPr lang="cs-CZ" sz="1400" dirty="0">
+                <a:solidFill>
+                  <a:srgbClr val="64748B"/>
+                </a:solidFill>
+                <a:latin typeface="Calibri" pitchFamily="34" charset="0"/>
+                <a:ea typeface="Calibri" pitchFamily="34" charset="-122"/>
+                <a:cs typeface="Calibri" pitchFamily="34" charset="-120"/>
+              </a:rPr>
+              <a:t> – </a:t>
+            </a:r>
+            <a:r>
+              <a:rPr lang="en-US" sz="1400" dirty="0" err="1">
+                <a:solidFill>
+                  <a:srgbClr val="64748B"/>
+                </a:solidFill>
+                <a:latin typeface="Calibri" pitchFamily="34" charset="0"/>
+                <a:ea typeface="Calibri" pitchFamily="34" charset="-122"/>
+                <a:cs typeface="Calibri" pitchFamily="34" charset="-120"/>
+              </a:rPr>
+              <a:t>neúnosná</a:t>
+            </a:r>
+            <a:endParaRPr lang="en-US" sz="1400" dirty="0"/>
           </a:p>
         </p:txBody>
       </p:sp>
@@ -2169,11 +2381,12 @@
           <a:bodyPr wrap="square" rtlCol="0" anchor="t"/>
           <a:lstStyle/>
           <a:p>
-            <a:pPr marL="0" indent="0">
-              <a:buNone/>
+            <a:pPr marL="171450" indent="-171450">
+              <a:buFont typeface="Wingdings" panose="05000000000000000000" pitchFamily="2" charset="2"/>
+              <a:buChar char="§"/>
             </a:pPr>
             <a:r>
-              <a:rPr lang="en-US" sz="1100" dirty="0">
+              <a:rPr lang="en-US" sz="1400" dirty="0" err="1">
                 <a:solidFill>
                   <a:srgbClr val="64748B"/>
                 </a:solidFill>
@@ -2181,9 +2394,284 @@
                 <a:ea typeface="Calibri" pitchFamily="34" charset="-122"/>
                 <a:cs typeface="Calibri" pitchFamily="34" charset="-120"/>
               </a:rPr>
-              <a:t>Sentimentová analýza a extrakce entit (NER) umožňují rychlé zpracování nestrukturovaných dat a jejich přeměnu na kvantitativní ukazatele.</a:t>
-            </a:r>
-            <a:endParaRPr lang="en-US" sz="1100" dirty="0"/>
+              <a:t>Sentimentová</a:t>
+            </a:r>
+            <a:r>
+              <a:rPr lang="en-US" sz="1400" dirty="0">
+                <a:solidFill>
+                  <a:srgbClr val="64748B"/>
+                </a:solidFill>
+                <a:latin typeface="Calibri" pitchFamily="34" charset="0"/>
+                <a:ea typeface="Calibri" pitchFamily="34" charset="-122"/>
+                <a:cs typeface="Calibri" pitchFamily="34" charset="-120"/>
+              </a:rPr>
+              <a:t> </a:t>
+            </a:r>
+            <a:r>
+              <a:rPr lang="en-US" sz="1400" dirty="0" err="1">
+                <a:solidFill>
+                  <a:srgbClr val="64748B"/>
+                </a:solidFill>
+                <a:latin typeface="Calibri" pitchFamily="34" charset="0"/>
+                <a:ea typeface="Calibri" pitchFamily="34" charset="-122"/>
+                <a:cs typeface="Calibri" pitchFamily="34" charset="-120"/>
+              </a:rPr>
+              <a:t>analýza</a:t>
+            </a:r>
+            <a:r>
+              <a:rPr lang="en-US" sz="1400" dirty="0">
+                <a:solidFill>
+                  <a:srgbClr val="64748B"/>
+                </a:solidFill>
+                <a:latin typeface="Calibri" pitchFamily="34" charset="0"/>
+                <a:ea typeface="Calibri" pitchFamily="34" charset="-122"/>
+                <a:cs typeface="Calibri" pitchFamily="34" charset="-120"/>
+              </a:rPr>
+              <a:t> a </a:t>
+            </a:r>
+            <a:r>
+              <a:rPr lang="en-US" sz="1400" dirty="0" err="1">
+                <a:solidFill>
+                  <a:srgbClr val="64748B"/>
+                </a:solidFill>
+                <a:latin typeface="Calibri" pitchFamily="34" charset="0"/>
+                <a:ea typeface="Calibri" pitchFamily="34" charset="-122"/>
+                <a:cs typeface="Calibri" pitchFamily="34" charset="-120"/>
+              </a:rPr>
+              <a:t>extrakce</a:t>
+            </a:r>
+            <a:r>
+              <a:rPr lang="en-US" sz="1400" dirty="0">
+                <a:solidFill>
+                  <a:srgbClr val="64748B"/>
+                </a:solidFill>
+                <a:latin typeface="Calibri" pitchFamily="34" charset="0"/>
+                <a:ea typeface="Calibri" pitchFamily="34" charset="-122"/>
+                <a:cs typeface="Calibri" pitchFamily="34" charset="-120"/>
+              </a:rPr>
+              <a:t> </a:t>
+            </a:r>
+            <a:r>
+              <a:rPr lang="en-US" sz="1400" dirty="0" err="1">
+                <a:solidFill>
+                  <a:srgbClr val="64748B"/>
+                </a:solidFill>
+                <a:latin typeface="Calibri" pitchFamily="34" charset="0"/>
+                <a:ea typeface="Calibri" pitchFamily="34" charset="-122"/>
+                <a:cs typeface="Calibri" pitchFamily="34" charset="-120"/>
+              </a:rPr>
+              <a:t>entit</a:t>
+            </a:r>
+            <a:r>
+              <a:rPr lang="en-US" sz="1400" dirty="0">
+                <a:solidFill>
+                  <a:srgbClr val="64748B"/>
+                </a:solidFill>
+                <a:latin typeface="Calibri" pitchFamily="34" charset="0"/>
+                <a:ea typeface="Calibri" pitchFamily="34" charset="-122"/>
+                <a:cs typeface="Calibri" pitchFamily="34" charset="-120"/>
+              </a:rPr>
+              <a:t> (NER)</a:t>
+            </a:r>
+            <a:r>
+              <a:rPr lang="cs-CZ" sz="1400" dirty="0">
+                <a:solidFill>
+                  <a:srgbClr val="64748B"/>
+                </a:solidFill>
+                <a:latin typeface="Calibri" pitchFamily="34" charset="0"/>
+                <a:ea typeface="Calibri" pitchFamily="34" charset="-122"/>
+                <a:cs typeface="Calibri" pitchFamily="34" charset="-120"/>
+              </a:rPr>
+              <a:t> – </a:t>
+            </a:r>
+            <a:r>
+              <a:rPr lang="en-US" sz="1400" dirty="0" err="1">
+                <a:solidFill>
+                  <a:srgbClr val="64748B"/>
+                </a:solidFill>
+                <a:latin typeface="Calibri" pitchFamily="34" charset="0"/>
+                <a:ea typeface="Calibri" pitchFamily="34" charset="-122"/>
+                <a:cs typeface="Calibri" pitchFamily="34" charset="-120"/>
+              </a:rPr>
+              <a:t>rychlé</a:t>
+            </a:r>
+            <a:r>
+              <a:rPr lang="en-US" sz="1400" dirty="0">
+                <a:solidFill>
+                  <a:srgbClr val="64748B"/>
+                </a:solidFill>
+                <a:latin typeface="Calibri" pitchFamily="34" charset="0"/>
+                <a:ea typeface="Calibri" pitchFamily="34" charset="-122"/>
+                <a:cs typeface="Calibri" pitchFamily="34" charset="-120"/>
+              </a:rPr>
+              <a:t> </a:t>
+            </a:r>
+            <a:r>
+              <a:rPr lang="en-US" sz="1400" dirty="0" err="1">
+                <a:solidFill>
+                  <a:srgbClr val="64748B"/>
+                </a:solidFill>
+                <a:latin typeface="Calibri" pitchFamily="34" charset="0"/>
+                <a:ea typeface="Calibri" pitchFamily="34" charset="-122"/>
+                <a:cs typeface="Calibri" pitchFamily="34" charset="-120"/>
+              </a:rPr>
+              <a:t>zpracování</a:t>
+            </a:r>
+            <a:r>
+              <a:rPr lang="en-US" sz="1400" dirty="0">
+                <a:solidFill>
+                  <a:srgbClr val="64748B"/>
+                </a:solidFill>
+                <a:latin typeface="Calibri" pitchFamily="34" charset="0"/>
+                <a:ea typeface="Calibri" pitchFamily="34" charset="-122"/>
+                <a:cs typeface="Calibri" pitchFamily="34" charset="-120"/>
+              </a:rPr>
+              <a:t> </a:t>
+            </a:r>
+            <a:r>
+              <a:rPr lang="en-US" sz="1400" dirty="0" err="1">
+                <a:solidFill>
+                  <a:srgbClr val="64748B"/>
+                </a:solidFill>
+                <a:latin typeface="Calibri" pitchFamily="34" charset="0"/>
+                <a:ea typeface="Calibri" pitchFamily="34" charset="-122"/>
+                <a:cs typeface="Calibri" pitchFamily="34" charset="-120"/>
+              </a:rPr>
+              <a:t>nestrukturovaných</a:t>
+            </a:r>
+            <a:r>
+              <a:rPr lang="en-US" sz="1400" dirty="0">
+                <a:solidFill>
+                  <a:srgbClr val="64748B"/>
+                </a:solidFill>
+                <a:latin typeface="Calibri" pitchFamily="34" charset="0"/>
+                <a:ea typeface="Calibri" pitchFamily="34" charset="-122"/>
+                <a:cs typeface="Calibri" pitchFamily="34" charset="-120"/>
+              </a:rPr>
+              <a:t> </a:t>
+            </a:r>
+            <a:r>
+              <a:rPr lang="en-US" sz="1400" dirty="0" err="1">
+                <a:solidFill>
+                  <a:srgbClr val="64748B"/>
+                </a:solidFill>
+                <a:latin typeface="Calibri" pitchFamily="34" charset="0"/>
+                <a:ea typeface="Calibri" pitchFamily="34" charset="-122"/>
+                <a:cs typeface="Calibri" pitchFamily="34" charset="-120"/>
+              </a:rPr>
+              <a:t>dat</a:t>
+            </a:r>
+            <a:r>
+              <a:rPr lang="en-US" sz="1400" dirty="0">
+                <a:solidFill>
+                  <a:srgbClr val="64748B"/>
+                </a:solidFill>
+                <a:latin typeface="Calibri" pitchFamily="34" charset="0"/>
+                <a:ea typeface="Calibri" pitchFamily="34" charset="-122"/>
+                <a:cs typeface="Calibri" pitchFamily="34" charset="-120"/>
+              </a:rPr>
+              <a:t> a </a:t>
+            </a:r>
+            <a:r>
+              <a:rPr lang="en-US" sz="1400" dirty="0" err="1">
+                <a:solidFill>
+                  <a:srgbClr val="64748B"/>
+                </a:solidFill>
+                <a:latin typeface="Calibri" pitchFamily="34" charset="0"/>
+                <a:ea typeface="Calibri" pitchFamily="34" charset="-122"/>
+                <a:cs typeface="Calibri" pitchFamily="34" charset="-120"/>
+              </a:rPr>
+              <a:t>jejich</a:t>
+            </a:r>
+            <a:r>
+              <a:rPr lang="en-US" sz="1400" dirty="0">
+                <a:solidFill>
+                  <a:srgbClr val="64748B"/>
+                </a:solidFill>
+                <a:latin typeface="Calibri" pitchFamily="34" charset="0"/>
+                <a:ea typeface="Calibri" pitchFamily="34" charset="-122"/>
+                <a:cs typeface="Calibri" pitchFamily="34" charset="-120"/>
+              </a:rPr>
+              <a:t> </a:t>
+            </a:r>
+            <a:r>
+              <a:rPr lang="en-US" sz="1400" dirty="0" err="1">
+                <a:solidFill>
+                  <a:srgbClr val="64748B"/>
+                </a:solidFill>
+                <a:latin typeface="Calibri" pitchFamily="34" charset="0"/>
+                <a:ea typeface="Calibri" pitchFamily="34" charset="-122"/>
+                <a:cs typeface="Calibri" pitchFamily="34" charset="-120"/>
+              </a:rPr>
+              <a:t>přeměnu</a:t>
+            </a:r>
+            <a:r>
+              <a:rPr lang="en-US" sz="1400" dirty="0">
+                <a:solidFill>
+                  <a:srgbClr val="64748B"/>
+                </a:solidFill>
+                <a:latin typeface="Calibri" pitchFamily="34" charset="0"/>
+                <a:ea typeface="Calibri" pitchFamily="34" charset="-122"/>
+                <a:cs typeface="Calibri" pitchFamily="34" charset="-120"/>
+              </a:rPr>
+              <a:t> </a:t>
+            </a:r>
+            <a:r>
+              <a:rPr lang="en-US" sz="1400" dirty="0" err="1">
+                <a:solidFill>
+                  <a:srgbClr val="64748B"/>
+                </a:solidFill>
+                <a:latin typeface="Calibri" pitchFamily="34" charset="0"/>
+                <a:ea typeface="Calibri" pitchFamily="34" charset="-122"/>
+                <a:cs typeface="Calibri" pitchFamily="34" charset="-120"/>
+              </a:rPr>
+              <a:t>na</a:t>
+            </a:r>
+            <a:r>
+              <a:rPr lang="en-US" sz="1400" dirty="0">
+                <a:solidFill>
+                  <a:srgbClr val="64748B"/>
+                </a:solidFill>
+                <a:latin typeface="Calibri" pitchFamily="34" charset="0"/>
+                <a:ea typeface="Calibri" pitchFamily="34" charset="-122"/>
+                <a:cs typeface="Calibri" pitchFamily="34" charset="-120"/>
+              </a:rPr>
+              <a:t> </a:t>
+            </a:r>
+            <a:r>
+              <a:rPr lang="en-US" sz="1400" dirty="0" err="1">
+                <a:solidFill>
+                  <a:srgbClr val="64748B"/>
+                </a:solidFill>
+                <a:latin typeface="Calibri" pitchFamily="34" charset="0"/>
+                <a:ea typeface="Calibri" pitchFamily="34" charset="-122"/>
+                <a:cs typeface="Calibri" pitchFamily="34" charset="-120"/>
+              </a:rPr>
+              <a:t>kvantitativní</a:t>
+            </a:r>
+            <a:r>
+              <a:rPr lang="en-US" sz="1400" dirty="0">
+                <a:solidFill>
+                  <a:srgbClr val="64748B"/>
+                </a:solidFill>
+                <a:latin typeface="Calibri" pitchFamily="34" charset="0"/>
+                <a:ea typeface="Calibri" pitchFamily="34" charset="-122"/>
+                <a:cs typeface="Calibri" pitchFamily="34" charset="-120"/>
+              </a:rPr>
+              <a:t> </a:t>
+            </a:r>
+            <a:r>
+              <a:rPr lang="en-US" sz="1400" dirty="0" err="1">
+                <a:solidFill>
+                  <a:srgbClr val="64748B"/>
+                </a:solidFill>
+                <a:latin typeface="Calibri" pitchFamily="34" charset="0"/>
+                <a:ea typeface="Calibri" pitchFamily="34" charset="-122"/>
+                <a:cs typeface="Calibri" pitchFamily="34" charset="-120"/>
+              </a:rPr>
+              <a:t>ukazatele</a:t>
+            </a:r>
+            <a:endParaRPr lang="en-US" sz="1400" dirty="0"/>
           </a:p>
         </p:txBody>
       </p:sp>
@@ -2346,11 +2834,12 @@
           <a:bodyPr wrap="square" rtlCol="0" anchor="t"/>
           <a:lstStyle/>
           <a:p>
-            <a:pPr marL="0" indent="0">
-              <a:buNone/>
+            <a:pPr marL="171450" indent="-171450">
+              <a:buFont typeface="Wingdings" panose="05000000000000000000" pitchFamily="2" charset="2"/>
+              <a:buChar char="§"/>
             </a:pPr>
             <a:r>
-              <a:rPr lang="en-US" sz="1100" dirty="0">
+              <a:rPr lang="en-US" sz="1400" dirty="0">
                 <a:solidFill>
                   <a:srgbClr val="64748B"/>
                 </a:solidFill>
@@ -2358,9 +2847,246 @@
                 <a:ea typeface="Calibri" pitchFamily="34" charset="-122"/>
                 <a:cs typeface="Calibri" pitchFamily="34" charset="-120"/>
               </a:rPr>
-              <a:t>Při zpracování konverzací je nutná anonymizace osobních údajů. Technické řešení musí být v souladu s nařízením EU 2016/679.</a:t>
-            </a:r>
-            <a:endParaRPr lang="en-US" sz="1100" dirty="0"/>
+              <a:t>Při </a:t>
+            </a:r>
+            <a:r>
+              <a:rPr lang="en-US" sz="1400" dirty="0" err="1">
+                <a:solidFill>
+                  <a:srgbClr val="64748B"/>
+                </a:solidFill>
+                <a:latin typeface="Calibri" pitchFamily="34" charset="0"/>
+                <a:ea typeface="Calibri" pitchFamily="34" charset="-122"/>
+                <a:cs typeface="Calibri" pitchFamily="34" charset="-120"/>
+              </a:rPr>
+              <a:t>zpracování</a:t>
+            </a:r>
+            <a:r>
+              <a:rPr lang="en-US" sz="1400" dirty="0">
+                <a:solidFill>
+                  <a:srgbClr val="64748B"/>
+                </a:solidFill>
+                <a:latin typeface="Calibri" pitchFamily="34" charset="0"/>
+                <a:ea typeface="Calibri" pitchFamily="34" charset="-122"/>
+                <a:cs typeface="Calibri" pitchFamily="34" charset="-120"/>
+              </a:rPr>
+              <a:t> </a:t>
+            </a:r>
+            <a:r>
+              <a:rPr lang="en-US" sz="1400" dirty="0" err="1">
+                <a:solidFill>
+                  <a:srgbClr val="64748B"/>
+                </a:solidFill>
+                <a:latin typeface="Calibri" pitchFamily="34" charset="0"/>
+                <a:ea typeface="Calibri" pitchFamily="34" charset="-122"/>
+                <a:cs typeface="Calibri" pitchFamily="34" charset="-120"/>
+              </a:rPr>
+              <a:t>konverzací</a:t>
+            </a:r>
+            <a:r>
+              <a:rPr lang="cs-CZ" sz="1400" dirty="0">
+                <a:solidFill>
+                  <a:srgbClr val="64748B"/>
+                </a:solidFill>
+                <a:latin typeface="Calibri" pitchFamily="34" charset="0"/>
+                <a:ea typeface="Calibri" pitchFamily="34" charset="-122"/>
+                <a:cs typeface="Calibri" pitchFamily="34" charset="-120"/>
+              </a:rPr>
+              <a:t> – </a:t>
+            </a:r>
+            <a:r>
+              <a:rPr lang="en-US" sz="1400" dirty="0" err="1">
+                <a:solidFill>
+                  <a:srgbClr val="64748B"/>
+                </a:solidFill>
+                <a:latin typeface="Calibri" pitchFamily="34" charset="0"/>
+                <a:ea typeface="Calibri" pitchFamily="34" charset="-122"/>
+                <a:cs typeface="Calibri" pitchFamily="34" charset="-120"/>
+              </a:rPr>
+              <a:t>nutná</a:t>
+            </a:r>
+            <a:r>
+              <a:rPr lang="en-US" sz="1400" dirty="0">
+                <a:solidFill>
+                  <a:srgbClr val="64748B"/>
+                </a:solidFill>
+                <a:latin typeface="Calibri" pitchFamily="34" charset="0"/>
+                <a:ea typeface="Calibri" pitchFamily="34" charset="-122"/>
+                <a:cs typeface="Calibri" pitchFamily="34" charset="-120"/>
+              </a:rPr>
+              <a:t> </a:t>
+            </a:r>
+            <a:r>
+              <a:rPr lang="en-US" sz="1400" dirty="0" err="1">
+                <a:solidFill>
+                  <a:srgbClr val="64748B"/>
+                </a:solidFill>
+                <a:latin typeface="Calibri" pitchFamily="34" charset="0"/>
+                <a:ea typeface="Calibri" pitchFamily="34" charset="-122"/>
+                <a:cs typeface="Calibri" pitchFamily="34" charset="-120"/>
+              </a:rPr>
+              <a:t>anonymizace</a:t>
+            </a:r>
+            <a:r>
+              <a:rPr lang="en-US" sz="1400" dirty="0">
+                <a:solidFill>
+                  <a:srgbClr val="64748B"/>
+                </a:solidFill>
+                <a:latin typeface="Calibri" pitchFamily="34" charset="0"/>
+                <a:ea typeface="Calibri" pitchFamily="34" charset="-122"/>
+                <a:cs typeface="Calibri" pitchFamily="34" charset="-120"/>
+              </a:rPr>
+              <a:t> </a:t>
+            </a:r>
+            <a:r>
+              <a:rPr lang="en-US" sz="1400" dirty="0" err="1">
+                <a:solidFill>
+                  <a:srgbClr val="64748B"/>
+                </a:solidFill>
+                <a:latin typeface="Calibri" pitchFamily="34" charset="0"/>
+                <a:ea typeface="Calibri" pitchFamily="34" charset="-122"/>
+                <a:cs typeface="Calibri" pitchFamily="34" charset="-120"/>
+              </a:rPr>
+              <a:t>osobních</a:t>
+            </a:r>
+            <a:r>
+              <a:rPr lang="en-US" sz="1400" dirty="0">
+                <a:solidFill>
+                  <a:srgbClr val="64748B"/>
+                </a:solidFill>
+                <a:latin typeface="Calibri" pitchFamily="34" charset="0"/>
+                <a:ea typeface="Calibri" pitchFamily="34" charset="-122"/>
+                <a:cs typeface="Calibri" pitchFamily="34" charset="-120"/>
+              </a:rPr>
+              <a:t> </a:t>
+            </a:r>
+            <a:r>
+              <a:rPr lang="en-US" sz="1400" dirty="0" err="1">
+                <a:solidFill>
+                  <a:srgbClr val="64748B"/>
+                </a:solidFill>
+                <a:latin typeface="Calibri" pitchFamily="34" charset="0"/>
+                <a:ea typeface="Calibri" pitchFamily="34" charset="-122"/>
+                <a:cs typeface="Calibri" pitchFamily="34" charset="-120"/>
+              </a:rPr>
+              <a:t>údajů</a:t>
+            </a:r>
+            <a:endParaRPr lang="cs-CZ" sz="1400" dirty="0">
+              <a:solidFill>
+                <a:srgbClr val="64748B"/>
+              </a:solidFill>
+              <a:latin typeface="Calibri" pitchFamily="34" charset="0"/>
+              <a:ea typeface="Calibri" pitchFamily="34" charset="-122"/>
+              <a:cs typeface="Calibri" pitchFamily="34" charset="-120"/>
+            </a:endParaRPr>
+          </a:p>
+          <a:p>
+            <a:pPr marL="171450" indent="-171450">
+              <a:buFont typeface="Wingdings" panose="05000000000000000000" pitchFamily="2" charset="2"/>
+              <a:buChar char="§"/>
+            </a:pPr>
+            <a:endParaRPr lang="cs-CZ" sz="1400" dirty="0">
+              <a:solidFill>
+                <a:srgbClr val="64748B"/>
+              </a:solidFill>
+              <a:latin typeface="Calibri" pitchFamily="34" charset="0"/>
+              <a:ea typeface="Calibri" pitchFamily="34" charset="-122"/>
+              <a:cs typeface="Calibri" pitchFamily="34" charset="-120"/>
+            </a:endParaRPr>
+          </a:p>
+          <a:p>
+            <a:pPr marL="171450" indent="-171450">
+              <a:buFont typeface="Wingdings" panose="05000000000000000000" pitchFamily="2" charset="2"/>
+              <a:buChar char="§"/>
+            </a:pPr>
+            <a:r>
+              <a:rPr lang="en-US" sz="1400" dirty="0" err="1">
+                <a:solidFill>
+                  <a:srgbClr val="64748B"/>
+                </a:solidFill>
+                <a:latin typeface="Calibri" pitchFamily="34" charset="0"/>
+                <a:ea typeface="Calibri" pitchFamily="34" charset="-122"/>
+                <a:cs typeface="Calibri" pitchFamily="34" charset="-120"/>
+              </a:rPr>
+              <a:t>Technické</a:t>
+            </a:r>
+            <a:r>
+              <a:rPr lang="en-US" sz="1400" dirty="0">
+                <a:solidFill>
+                  <a:srgbClr val="64748B"/>
+                </a:solidFill>
+                <a:latin typeface="Calibri" pitchFamily="34" charset="0"/>
+                <a:ea typeface="Calibri" pitchFamily="34" charset="-122"/>
+                <a:cs typeface="Calibri" pitchFamily="34" charset="-120"/>
+              </a:rPr>
+              <a:t> </a:t>
+            </a:r>
+            <a:r>
+              <a:rPr lang="en-US" sz="1400" dirty="0" err="1">
+                <a:solidFill>
+                  <a:srgbClr val="64748B"/>
+                </a:solidFill>
+                <a:latin typeface="Calibri" pitchFamily="34" charset="0"/>
+                <a:ea typeface="Calibri" pitchFamily="34" charset="-122"/>
+                <a:cs typeface="Calibri" pitchFamily="34" charset="-120"/>
+              </a:rPr>
+              <a:t>řešení</a:t>
+            </a:r>
+            <a:r>
+              <a:rPr lang="cs-CZ" sz="1400" dirty="0">
+                <a:solidFill>
+                  <a:srgbClr val="64748B"/>
+                </a:solidFill>
+                <a:latin typeface="Calibri" pitchFamily="34" charset="0"/>
+                <a:ea typeface="Calibri" pitchFamily="34" charset="-122"/>
+                <a:cs typeface="Calibri" pitchFamily="34" charset="-120"/>
+              </a:rPr>
+              <a:t> – v </a:t>
+            </a:r>
+            <a:r>
+              <a:rPr lang="en-US" sz="1400" dirty="0" err="1">
+                <a:solidFill>
+                  <a:srgbClr val="64748B"/>
+                </a:solidFill>
+                <a:latin typeface="Calibri" pitchFamily="34" charset="0"/>
+                <a:ea typeface="Calibri" pitchFamily="34" charset="-122"/>
+                <a:cs typeface="Calibri" pitchFamily="34" charset="-120"/>
+              </a:rPr>
+              <a:t>souladu</a:t>
+            </a:r>
+            <a:r>
+              <a:rPr lang="en-US" sz="1400" dirty="0">
+                <a:solidFill>
+                  <a:srgbClr val="64748B"/>
+                </a:solidFill>
+                <a:latin typeface="Calibri" pitchFamily="34" charset="0"/>
+                <a:ea typeface="Calibri" pitchFamily="34" charset="-122"/>
+                <a:cs typeface="Calibri" pitchFamily="34" charset="-120"/>
+              </a:rPr>
+              <a:t> s </a:t>
+            </a:r>
+            <a:r>
+              <a:rPr lang="en-US" sz="1400" dirty="0" err="1">
+                <a:solidFill>
+                  <a:srgbClr val="64748B"/>
+                </a:solidFill>
+                <a:latin typeface="Calibri" pitchFamily="34" charset="0"/>
+                <a:ea typeface="Calibri" pitchFamily="34" charset="-122"/>
+                <a:cs typeface="Calibri" pitchFamily="34" charset="-120"/>
+              </a:rPr>
+              <a:t>nařízením</a:t>
+            </a:r>
+            <a:r>
+              <a:rPr lang="en-US" sz="1400" dirty="0">
+                <a:solidFill>
+                  <a:srgbClr val="64748B"/>
+                </a:solidFill>
+                <a:latin typeface="Calibri" pitchFamily="34" charset="0"/>
+                <a:ea typeface="Calibri" pitchFamily="34" charset="-122"/>
+                <a:cs typeface="Calibri" pitchFamily="34" charset="-120"/>
+              </a:rPr>
+              <a:t> EU 2016/679</a:t>
+            </a:r>
+            <a:endParaRPr lang="en-US" sz="1400" dirty="0"/>
           </a:p>
         </p:txBody>
       </p:sp>

--- a/obhajoba_prezentace.pptx
+++ b/obhajoba_prezentace.pptx
@@ -4899,6 +4899,28 @@
               <a:buNone/>
             </a:pPr>
             <a:r>
+              <a:rPr lang="en-US" sz="1100" b="1" dirty="0" err="1">
+                <a:solidFill>
+                  <a:srgbClr val="1E293B"/>
+                </a:solidFill>
+                <a:latin typeface="Calibri" pitchFamily="34" charset="0"/>
+                <a:ea typeface="Calibri" pitchFamily="34" charset="-122"/>
+                <a:cs typeface="Calibri" pitchFamily="34" charset="-120"/>
+              </a:rPr>
+              <a:t>Načtení</a:t>
+            </a:r>
+            <a:r>
+              <a:rPr lang="cs-CZ" sz="1100" b="1" dirty="0">
+                <a:solidFill>
+                  <a:srgbClr val="1E293B"/>
+                </a:solidFill>
+                <a:latin typeface="Calibri" pitchFamily="34" charset="0"/>
+                <a:ea typeface="Calibri" pitchFamily="34" charset="-122"/>
+                <a:cs typeface="Calibri" pitchFamily="34" charset="-120"/>
+              </a:rPr>
+              <a:t>,</a:t>
+            </a:r>
+            <a:r>
               <a:rPr lang="en-US" sz="1100" b="1" dirty="0">
                 <a:solidFill>
                   <a:srgbClr val="1E293B"/>
@@ -4907,7 +4929,62 @@
                 <a:ea typeface="Calibri" pitchFamily="34" charset="-122"/>
                 <a:cs typeface="Calibri" pitchFamily="34" charset="-120"/>
               </a:rPr>
-              <a:t>Načtení &amp; anonymizace dat</a:t>
+              <a:t> </a:t>
+            </a:r>
+            <a:r>
+              <a:rPr lang="en-US" sz="1100" b="1" dirty="0" err="1">
+                <a:solidFill>
+                  <a:srgbClr val="1E293B"/>
+                </a:solidFill>
+                <a:latin typeface="Calibri" pitchFamily="34" charset="0"/>
+                <a:ea typeface="Calibri" pitchFamily="34" charset="-122"/>
+                <a:cs typeface="Calibri" pitchFamily="34" charset="-120"/>
+              </a:rPr>
+              <a:t>anonymizace</a:t>
+            </a:r>
+            <a:r>
+              <a:rPr lang="en-US" sz="1100" b="1" dirty="0">
+                <a:solidFill>
+                  <a:srgbClr val="1E293B"/>
+                </a:solidFill>
+                <a:latin typeface="Calibri" pitchFamily="34" charset="0"/>
+                <a:ea typeface="Calibri" pitchFamily="34" charset="-122"/>
+                <a:cs typeface="Calibri" pitchFamily="34" charset="-120"/>
+              </a:rPr>
+              <a:t> </a:t>
+            </a:r>
+            <a:r>
+              <a:rPr lang="en-US" sz="1100" b="1" dirty="0" err="1">
+                <a:solidFill>
+                  <a:srgbClr val="1E293B"/>
+                </a:solidFill>
+                <a:latin typeface="Calibri" pitchFamily="34" charset="0"/>
+                <a:ea typeface="Calibri" pitchFamily="34" charset="-122"/>
+                <a:cs typeface="Calibri" pitchFamily="34" charset="-120"/>
+              </a:rPr>
+              <a:t>dat</a:t>
+            </a:r>
+            <a:r>
+              <a:rPr lang="cs-CZ" sz="1100" b="1" dirty="0">
+                <a:solidFill>
+                  <a:srgbClr val="1E293B"/>
+                </a:solidFill>
+                <a:latin typeface="Calibri" pitchFamily="34" charset="0"/>
+                <a:ea typeface="Calibri" pitchFamily="34" charset="-122"/>
+                <a:cs typeface="Calibri" pitchFamily="34" charset="-120"/>
+              </a:rPr>
+              <a:t>, </a:t>
+            </a:r>
+            <a:r>
+              <a:rPr lang="cs-CZ" sz="1100" b="1" dirty="0" err="1">
+                <a:solidFill>
+                  <a:srgbClr val="1E293B"/>
+                </a:solidFill>
+                <a:latin typeface="Calibri" pitchFamily="34" charset="0"/>
+                <a:ea typeface="Calibri" pitchFamily="34" charset="-122"/>
+                <a:cs typeface="Calibri" pitchFamily="34" charset="-120"/>
+              </a:rPr>
+              <a:t>Tokenizace</a:t>
             </a:r>
             <a:endParaRPr lang="en-US" sz="1100" dirty="0"/>
           </a:p>
@@ -4934,9 +5011,17 @@
           <a:bodyPr wrap="square" rtlCol="0" anchor="t"/>
           <a:lstStyle/>
           <a:p>
-            <a:pPr marL="0" indent="0">
-              <a:buNone/>
-            </a:pPr>
+            <a:r>
+              <a:rPr lang="en-US" sz="950" dirty="0" err="1">
+                <a:solidFill>
+                  <a:srgbClr val="64748B"/>
+                </a:solidFill>
+                <a:latin typeface="Calibri" pitchFamily="34" charset="0"/>
+                <a:ea typeface="Calibri" pitchFamily="34" charset="-122"/>
+                <a:cs typeface="Calibri" pitchFamily="34" charset="-120"/>
+              </a:rPr>
+              <a:t>maskování</a:t>
+            </a:r>
             <a:r>
               <a:rPr lang="en-US" sz="950" dirty="0">
                 <a:solidFill>
@@ -4946,7 +5031,29 @@
                 <a:ea typeface="Calibri" pitchFamily="34" charset="-122"/>
                 <a:cs typeface="Calibri" pitchFamily="34" charset="-120"/>
               </a:rPr>
-              <a:t>maskování jmen, e-mailů, tel. čísel</a:t>
+              <a:t> </a:t>
+            </a:r>
+            <a:r>
+              <a:rPr lang="cs-CZ" sz="950" dirty="0">
+                <a:solidFill>
+                  <a:srgbClr val="64748B"/>
+                </a:solidFill>
+                <a:latin typeface="Calibri" pitchFamily="34" charset="0"/>
+                <a:ea typeface="Calibri" pitchFamily="34" charset="-122"/>
+                <a:cs typeface="Calibri" pitchFamily="34" charset="-120"/>
+              </a:rPr>
+              <a:t>citlivých údajů &amp; </a:t>
+            </a:r>
+            <a:r>
+              <a:rPr lang="en-US" sz="950" dirty="0">
+                <a:solidFill>
+                  <a:srgbClr val="64748B"/>
+                </a:solidFill>
+                <a:latin typeface="Calibri" pitchFamily="34" charset="0"/>
+                <a:ea typeface="Calibri" pitchFamily="34" charset="-122"/>
+                <a:cs typeface="Calibri" pitchFamily="34" charset="-120"/>
+              </a:rPr>
+              <a:t>padding, truncation, attention mask</a:t>
             </a:r>
             <a:endParaRPr lang="en-US" sz="950" dirty="0"/>
           </a:p>
@@ -5048,15 +5155,34 @@
               <a:buNone/>
             </a:pPr>
             <a:r>
-              <a:rPr lang="en-US" sz="1100" b="1" dirty="0">
+              <a:rPr lang="cs-CZ" sz="1100" b="1" dirty="0">
                 <a:solidFill>
                   <a:srgbClr val="1E293B"/>
                 </a:solidFill>
                 <a:latin typeface="Calibri" pitchFamily="34" charset="0"/>
-                <a:ea typeface="Calibri" pitchFamily="34" charset="-122"/>
-                <a:cs typeface="Calibri" pitchFamily="34" charset="-120"/>
-              </a:rPr>
-              <a:t>Tokenizace (RoBERTa tokenizer)</a:t>
+                <a:cs typeface="Calibri" pitchFamily="34" charset="-120"/>
+              </a:rPr>
+              <a:t>Nastavení </a:t>
+            </a:r>
+            <a:r>
+              <a:rPr lang="cs-CZ" sz="1100" b="1" dirty="0" err="1">
+                <a:solidFill>
+                  <a:srgbClr val="1E293B"/>
+                </a:solidFill>
+                <a:latin typeface="Calibri" pitchFamily="34" charset="0"/>
+                <a:cs typeface="Calibri" pitchFamily="34" charset="-120"/>
+              </a:rPr>
+              <a:t>hyperparametrů</a:t>
+            </a:r>
+            <a:r>
+              <a:rPr lang="cs-CZ" sz="1100" b="1" dirty="0">
+                <a:solidFill>
+                  <a:srgbClr val="1E293B"/>
+                </a:solidFill>
+                <a:latin typeface="Calibri" pitchFamily="34" charset="0"/>
+                <a:cs typeface="Calibri" pitchFamily="34" charset="-120"/>
+              </a:rPr>
+              <a:t> pro trénink</a:t>
             </a:r>
             <a:endParaRPr lang="en-US" sz="1100" dirty="0"/>
           </a:p>
@@ -5087,7 +5213,7 @@
               <a:buNone/>
             </a:pPr>
             <a:r>
-              <a:rPr lang="en-US" sz="950" dirty="0">
+              <a:rPr lang="cs-CZ" sz="950" dirty="0">
                 <a:solidFill>
                   <a:srgbClr val="64748B"/>
                 </a:solidFill>
@@ -5095,7 +5221,29 @@
                 <a:ea typeface="Calibri" pitchFamily="34" charset="-122"/>
                 <a:cs typeface="Calibri" pitchFamily="34" charset="-120"/>
               </a:rPr>
-              <a:t>padding, truncation, attention mask</a:t>
+              <a:t>Learning </a:t>
+            </a:r>
+            <a:r>
+              <a:rPr lang="cs-CZ" sz="950" dirty="0" err="1">
+                <a:solidFill>
+                  <a:srgbClr val="64748B"/>
+                </a:solidFill>
+                <a:latin typeface="Calibri" pitchFamily="34" charset="0"/>
+                <a:ea typeface="Calibri" pitchFamily="34" charset="-122"/>
+                <a:cs typeface="Calibri" pitchFamily="34" charset="-120"/>
+              </a:rPr>
+              <a:t>rate</a:t>
+            </a:r>
+            <a:r>
+              <a:rPr lang="cs-CZ" sz="950" dirty="0">
+                <a:solidFill>
+                  <a:srgbClr val="64748B"/>
+                </a:solidFill>
+                <a:latin typeface="Calibri" pitchFamily="34" charset="0"/>
+                <a:ea typeface="Calibri" pitchFamily="34" charset="-122"/>
+                <a:cs typeface="Calibri" pitchFamily="34" charset="-120"/>
+              </a:rPr>
+              <a:t>: 2e-5, počet epoch: 3, míra váhy úbytku: 0,1</a:t>
             </a:r>
             <a:endParaRPr lang="en-US" sz="950" dirty="0"/>
           </a:p>
